--- a/10-Knowledge-Products/KP1-GEA/videos/module_5/en/decks/KP1_M5_5.1_Deck_v0.2.pptx
+++ b/10-Knowledge-Products/KP1-GEA/videos/module_5/en/decks/KP1_M5_5.1_Deck_v0.2.pptx
@@ -14,7 +14,6 @@
     <p:handoutMasterId r:id="rId47"/>
   </p:handoutMasterIdLst>
   <p:sldIdLst>
-    <p:sldId id="2681" r:id="rId8"/>
     <p:sldId id="2696" r:id="rId18"/>
     <p:sldId id="2697" r:id="rId19"/>
     <p:sldId id="2698" r:id="rId20"/>
@@ -22,6 +21,7 @@
     <p:sldId id="2700" r:id="rId22"/>
     <p:sldId id="2701" r:id="rId23"/>
     <p:sldId id="2702" r:id="rId24"/>
+    <p:sldId id="2703" r:id="rId25"/>
   </p:sldIdLst>
   <p:sldSz cx="12192000" cy="6858000"/>
   <p:notesSz cx="6858000" cy="9144000"/>
@@ -888,7 +888,7 @@
 </p:notesMaster>
 </file>
 
-<file path=ppt/notesSlides/notesSlide21.xml><?xml version="1.0" encoding="utf-8"?>
+<file path=ppt/notesSlides/notesSlide10.xml><?xml version="1.0" encoding="utf-8"?>
 <p:notes xmlns:a="http://schemas.openxmlformats.org/drawingml/2006/main" xmlns:p="http://schemas.openxmlformats.org/presentationml/2006/main" xmlns:r="http://schemas.openxmlformats.org/officeDocument/2006/relationships">
   <p:cSld>
     <p:spTree>
@@ -933,7 +933,7 @@
           <a:lstStyle/>
           <a:p>
             <a:r>
-              <a:t>Title card for standalone video 5.1. Content slides are identical to the corresponding section of the combined deck KP1_M5_Deck_v0.2.pptx; voice-over is in each slide’s notes.</a:t>
+              <a:t>Sources slide, held ~5 seconds at the end of the video. Links are compiled into the YouTube description per ITU convention; no URLs read aloud.</a:t>
             </a:r>
           </a:p>
         </p:txBody>
@@ -1003,13 +1003,7 @@
           <a:lstStyle/>
           <a:p>
             <a:r>
-              <a:t>VO, slide 1: Before you commit your agency, you are right to ask: is this proven, or a consultant's theory? The honest answer is that the core of it has already been done — in countries large and small, unitary and federal, well-resourced and not.</a:t>
-            </a:r>
-          </a:p>
-          <a:p/>
-          <a:p>
-            <a:r>
-              <a:t>On screen: the four countries appear as plain typography only — no flags, no national emblems, no agency logos. They are public examples cited to public sources, never the team's own engagements.</a:t>
+              <a:t>Title card — the cold open. The hosts name the module, the video number, the title and the single message on this slide; no scripted narration. Hold until the opener begins; the opener is narrated on the next slide.</a:t>
             </a:r>
           </a:p>
         </p:txBody>
@@ -1079,13 +1073,13 @@
           <a:lstStyle/>
           <a:p>
             <a:r>
-              <a:t>VO: Four signposts, deliberately different. Rwanda — a small country with a strong centre, one citizen-services platform, a national identity linked across services. Kenya — physical one-stop centres and a unifying identity programme, with results that are mixed and openly debated. South Africa — a federal state where no architecture can be imposed from the top, coordinated instead through a central agency and shared standards. And Estonia — a mature reference, distributed registries, the once-only principle, almost every service online. Four governments that could hardly be more different in size, resources and shape.</a:t>
+              <a:t>VO: Before you commit your agency, you are right to ask: is this proven, or a consultant's theory? The honest answer is that the core of it has already been done — in countries large and small, unitary and federal, well-resourced and not.</a:t>
             </a:r>
           </a:p>
           <a:p/>
           <a:p>
             <a:r>
-              <a:t>Production cue: the first half of the module's centrepiece. Hold it a beat longer — the next slide is what turns these four into evidence.</a:t>
+              <a:t>On screen: the four countries appear as plain typography only — no flags, no national emblems, no agency logos. They are public examples cited to public sources, never the team's own engagements.</a:t>
             </a:r>
           </a:p>
         </p:txBody>
@@ -1155,13 +1149,13 @@
           <a:lstStyle/>
           <a:p>
             <a:r>
-              <a:t>VO: What makes them evidence is not that they are all the same — they are not — but that the same architectural elements show in every one. A small central team with real authority. A published framework that other agencies adopt rather than fight. A governance mechanism that is binding, not advisory. And a time horizon measured in years for full maturity, with intermediate results visible inside months. Four contexts, one recurring pattern. That recurrence is what tells you the pattern is real, not local luck.</a:t>
+              <a:t>VO: Four signposts, deliberately different. Rwanda — a small country with a strong centre, one citizen-services platform, a national identity linked across services. Kenya — physical one-stop centres and a unifying identity programme, with results that are mixed and openly debated. South Africa — a federal state where no architecture can be imposed from the top, coordinated instead through a central agency and shared standards. And Estonia — a mature reference, distributed registries, the once-only principle, almost every service online. Four governments that could hardly be more different in size, resources and shape.</a:t>
             </a:r>
           </a:p>
           <a:p/>
           <a:p>
             <a:r>
-              <a:t>Production cue: the centrepiece slide of the module. Reveal the four rows one at a time; the closing line is the whole argument of this video.</a:t>
+              <a:t>Production cue: the first half of the module's centrepiece. Hold it a beat longer — the next slide is what turns these four into evidence.</a:t>
             </a:r>
           </a:p>
         </p:txBody>
@@ -1231,7 +1225,13 @@
           <a:lstStyle/>
           <a:p>
             <a:r>
-              <a:t>VO: And be honest about the mixed results, because that honesty is what makes the evidence trustworthy. Kenya's identity programme met real obstacles — in the courts, in parliament, in implementation — and the debate is public and documented. That is not a reason to dismiss the approach; it is part of the evidence. The programmes that struggled struggled for reasons you can learn from, and the reasons are remarkably consistent. The evidence is not a brochure of successes. It is a record of what works and what does not, which is far more useful to you.</a:t>
+              <a:t>VO: What makes them evidence is not that they are all the same — they are not — but that the same architectural elements show in every one. A small central team with real authority. A published framework that other agencies adopt rather than fight. A governance mechanism that is binding, not advisory. And a time horizon measured in years for full maturity, with intermediate results visible inside months. Four contexts, one recurring pattern. That recurrence is what tells you the pattern is real, not local luck.</a:t>
+            </a:r>
+          </a:p>
+          <a:p/>
+          <a:p>
+            <a:r>
+              <a:t>Production cue: the centrepiece slide of the module. Reveal the four rows one at a time; the closing line is the whole argument of this video.</a:t>
             </a:r>
           </a:p>
         </p:txBody>
@@ -1301,13 +1301,7 @@
           <a:lstStyle/>
           <a:p>
             <a:r>
-              <a:t>VO: What this means for your agency is simple and freeing. You are not the first. The path is charted, the common elements are known, and so are the common ways programmes fail. You are not being asked to invent an approach and hope it works. You are being asked to adapt a pattern that four very different governments have already shown delivers — to your country, your constraints, your sector. That is a far easier case to make to a minister than 'trust me, this should work'.</a:t>
-            </a:r>
-          </a:p>
-          <a:p/>
-          <a:p>
-            <a:r>
-              <a:t>Production cue: the pivotal slide of this video. Hold it a beat longer.</a:t>
+              <a:t>VO: And be honest about the mixed results, because that honesty is what makes the evidence trustworthy. Kenya's identity programme met real obstacles — in the courts, in parliament, in implementation — and the debate is public and documented. That is not a reason to dismiss the approach; it is part of the evidence. The programmes that struggled struggled for reasons you can learn from, and the reasons are remarkably consistent. The evidence is not a brochure of successes. It is a record of what works and what does not, which is far more useful to you.</a:t>
             </a:r>
           </a:p>
         </p:txBody>
@@ -1377,13 +1371,13 @@
           <a:lstStyle/>
           <a:p>
             <a:r>
-              <a:t>PRACTICE BOX (on-screen only — never read it, never paraphrase it, never point at it). It replaces the narrated handoff: this video ends on the recap and the Sources slide.</a:t>
+              <a:t>VO: What this means for your agency is simple and freeing. You are not the first. The path is charted, the common elements are known, and so are the common ways programmes fail. You are not being asked to invent an approach and hope it works. You are being asked to adapt a pattern that four very different governments have already shown delivers — to your country, your constraints, your sector. That is a far easier case to make to a minister than 'trust me, this should work'.</a:t>
             </a:r>
           </a:p>
           <a:p/>
           <a:p>
             <a:r>
-              <a:t>VO: So when someone asks whether this is proven, you have an answer: four governments, four shapes, one recurring pattern, with the failures as documented as the successes. Not theory — a charted path.</a:t>
+              <a:t>Production cue: the pivotal slide of this video. Hold it a beat longer.</a:t>
             </a:r>
           </a:p>
         </p:txBody>
@@ -1453,7 +1447,13 @@
           <a:lstStyle/>
           <a:p>
             <a:r>
-              <a:t>Sources slide, held ~5 seconds at the end of the video. Links are compiled into the YouTube description per ITU convention; no URLs read aloud.</a:t>
+              <a:t>PRACTICE BOX (on-screen only — never read it, never paraphrase it, never point at it). It replaces the narrated handoff: this video ends on the recap and the Sources slide.</a:t>
+            </a:r>
+          </a:p>
+          <a:p/>
+          <a:p>
+            <a:r>
+              <a:t>VO: So when someone asks whether this is proven, you have an answer: four governments, four shapes, one recurring pattern, with the failures as documented as the successes. Not theory — a charted path.</a:t>
             </a:r>
           </a:p>
         </p:txBody>
@@ -11614,8 +11614,8 @@
 </p:sldMaster>
 </file>
 
-<file path=ppt/slides/slide1.xml><?xml version="1.0" encoding="utf-8"?>
-<p:sld xmlns:a="http://schemas.openxmlformats.org/drawingml/2006/main" xmlns:r="http://schemas.openxmlformats.org/officeDocument/2006/relationships" xmlns:p="http://schemas.openxmlformats.org/presentationml/2006/main">
+<file path=ppt/slides/slide10.xml><?xml version="1.0" encoding="utf-8"?>
+<p:sld xmlns:a="http://schemas.openxmlformats.org/drawingml/2006/main" xmlns:p="http://schemas.openxmlformats.org/presentationml/2006/main" xmlns:r="http://schemas.openxmlformats.org/officeDocument/2006/relationships">
   <p:cSld>
     <p:spTree>
       <p:nvGrpSpPr>
@@ -11623,339 +11623,17 @@
         <p:cNvGrpSpPr/>
         <p:nvPr/>
       </p:nvGrpSpPr>
-      <p:grpSpPr>
-        <a:xfrm>
-          <a:off x="0" y="0"/>
-          <a:ext cx="0" cy="0"/>
-          <a:chOff x="0" y="0"/>
-          <a:chExt cx="0" cy="0"/>
-        </a:xfrm>
-      </p:grpSpPr>
-      <p:cxnSp>
-        <p:nvCxnSpPr>
-          <p:cNvPr id="11" name="Straight Connector 10">
-            <a:extLst>
-              <a:ext uri="{FF2B5EF4-FFF2-40B4-BE49-F238E27FC236}">
-                <a16:creationId xmlns:a16="http://schemas.microsoft.com/office/drawing/2014/main" id="{D9AD66F2-F7C0-4D03-9150-D28F17AC561D}"/>
-              </a:ext>
-            </a:extLst>
-          </p:cNvPr>
-          <p:cNvCxnSpPr>
-            <a:cxnSpLocks/>
-          </p:cNvCxnSpPr>
-          <p:nvPr/>
-        </p:nvCxnSpPr>
-        <p:spPr>
-          <a:xfrm>
-            <a:off x="373021" y="2198718"/>
-            <a:ext cx="6843567" cy="0"/>
-          </a:xfrm>
-          <a:prstGeom prst="line">
-            <a:avLst/>
-          </a:prstGeom>
-          <a:ln w="12700">
-            <a:solidFill>
-              <a:srgbClr val="009CD6"/>
-            </a:solidFill>
-          </a:ln>
-        </p:spPr>
-        <p:style>
-          <a:lnRef idx="1">
-            <a:schemeClr val="accent1"/>
-          </a:lnRef>
-          <a:fillRef idx="0">
-            <a:schemeClr val="accent1"/>
-          </a:fillRef>
-          <a:effectRef idx="0">
-            <a:schemeClr val="accent1"/>
-          </a:effectRef>
-          <a:fontRef idx="minor">
-            <a:schemeClr val="tx1"/>
-          </a:fontRef>
-        </p:style>
-      </p:cxnSp>
-      <p:sp>
-        <p:nvSpPr>
-          <p:cNvPr id="12" name="Title 9">
-            <a:extLst>
-              <a:ext uri="{FF2B5EF4-FFF2-40B4-BE49-F238E27FC236}">
-                <a16:creationId xmlns:a16="http://schemas.microsoft.com/office/drawing/2014/main" id="{EEB08032-CE0E-4986-AEDF-A41026C0E8B9}"/>
-              </a:ext>
-            </a:extLst>
-          </p:cNvPr>
-          <p:cNvSpPr txBox="1">
-            <a:spLocks/>
-          </p:cNvSpPr>
-          <p:nvPr/>
-        </p:nvSpPr>
-        <p:spPr>
-          <a:xfrm>
-            <a:off x="237734" y="702833"/>
-            <a:ext cx="6432007" cy="1218817"/>
-          </a:xfrm>
-          <a:prstGeom prst="rect">
-            <a:avLst/>
-          </a:prstGeom>
-        </p:spPr>
-        <p:txBody>
-          <a:bodyPr anchor="b">
-            <a:noAutofit/>
-          </a:bodyPr>
-          <a:lstStyle>
-            <a:lvl1pPr algn="l" defTabSz="914400" rtl="0" eaLnBrk="1" latinLnBrk="0" hangingPunct="1">
-              <a:lnSpc>
-                <a:spcPct val="90000"/>
-              </a:lnSpc>
-              <a:spcBef>
-                <a:spcPct val="0"/>
-              </a:spcBef>
-              <a:buNone/>
-              <a:defRPr sz="4000" kern="1200">
-                <a:solidFill>
-                  <a:schemeClr val="bg1"/>
-                </a:solidFill>
-                <a:latin typeface="Arial" panose="020B0604020202020204" pitchFamily="34" charset="0"/>
-                <a:ea typeface="+mj-ea"/>
-                <a:cs typeface="Arial" panose="020B0604020202020204" pitchFamily="34" charset="0"/>
-              </a:defRPr>
-            </a:lvl1pPr>
-          </a:lstStyle>
-          <a:p>
-            <a:r>
-              <a:rPr sz="2400" b="1" i="0">
-                <a:solidFill>
-                  <a:srgbClr val="1A1A1A"/>
-                </a:solidFill>
-                <a:latin typeface="Arial"/>
-              </a:rPr>
-              <a:t>5.1 — Is this proven, or just theory? — evidence from real programmes</a:t>
-            </a:r>
-          </a:p>
-        </p:txBody>
-      </p:sp>
-      <p:pic>
-        <p:nvPicPr>
-          <p:cNvPr id="7" name="Picture 6">
-            <a:extLst>
-              <a:ext uri="{FF2B5EF4-FFF2-40B4-BE49-F238E27FC236}">
-                <a16:creationId xmlns:a16="http://schemas.microsoft.com/office/drawing/2014/main" id="{A2066351-C569-4C4C-A096-308777FCDC32}"/>
-              </a:ext>
-            </a:extLst>
-          </p:cNvPr>
-          <p:cNvPicPr>
-            <a:picLocks noChangeAspect="1"/>
-          </p:cNvPicPr>
-          <p:nvPr/>
-        </p:nvPicPr>
-        <p:blipFill>
-          <a:blip r:embed="rId2">
-            <a:extLst>
-              <a:ext uri="{28A0092B-C50C-407E-A947-70E740481C1C}">
-                <a14:useLocalDpi xmlns:a14="http://schemas.microsoft.com/office/drawing/2010/main" val="0"/>
-              </a:ext>
-            </a:extLst>
-          </a:blip>
-          <a:srcRect t="20219" b="14729"/>
-          <a:stretch>
-            <a:fillRect/>
-          </a:stretch>
-        </p:blipFill>
-        <p:spPr>
-          <a:xfrm>
-            <a:off x="0" y="5620871"/>
-            <a:ext cx="1323975" cy="1218816"/>
-          </a:xfrm>
-          <a:prstGeom prst="rect">
-            <a:avLst/>
-          </a:prstGeom>
-        </p:spPr>
-      </p:pic>
-      <p:sp>
-        <p:nvSpPr>
-          <p:cNvPr id="14" name="Title 9">
-            <a:extLst>
-              <a:ext uri="{FF2B5EF4-FFF2-40B4-BE49-F238E27FC236}">
-                <a16:creationId xmlns:a16="http://schemas.microsoft.com/office/drawing/2014/main" id="{B5087B80-3EE4-1881-0130-ED58CA625092}"/>
-              </a:ext>
-            </a:extLst>
-          </p:cNvPr>
-          <p:cNvSpPr txBox="1">
-            <a:spLocks/>
-          </p:cNvSpPr>
-          <p:nvPr/>
-        </p:nvSpPr>
-        <p:spPr>
-          <a:xfrm>
-            <a:off x="284452" y="2475786"/>
-            <a:ext cx="6382893" cy="953213"/>
-          </a:xfrm>
-          <a:prstGeom prst="rect">
-            <a:avLst/>
-          </a:prstGeom>
-        </p:spPr>
-        <p:txBody>
-          <a:bodyPr anchor="t">
-            <a:noAutofit/>
-          </a:bodyPr>
-          <a:lstStyle>
-            <a:lvl1pPr algn="l" defTabSz="914400" rtl="0" eaLnBrk="1" latinLnBrk="0" hangingPunct="1">
-              <a:lnSpc>
-                <a:spcPct val="90000"/>
-              </a:lnSpc>
-              <a:spcBef>
-                <a:spcPct val="0"/>
-              </a:spcBef>
-              <a:buNone/>
-              <a:defRPr sz="4000" kern="1200">
-                <a:solidFill>
-                  <a:schemeClr val="bg1"/>
-                </a:solidFill>
-                <a:latin typeface="Arial" panose="020B0604020202020204" pitchFamily="34" charset="0"/>
-                <a:ea typeface="+mj-ea"/>
-                <a:cs typeface="Arial" panose="020B0604020202020204" pitchFamily="34" charset="0"/>
-              </a:defRPr>
-            </a:lvl1pPr>
-          </a:lstStyle>
-          <a:p>
-            <a:pPr marL="0" marR="0" lvl="0" indent="0" rtl="0">
-              <a:spcBef>
-                <a:spcPts val="600"/>
-              </a:spcBef>
-              <a:spcAft>
-                <a:spcPts val="0"/>
-              </a:spcAft>
-              <a:buNone/>
-            </a:pPr>
-            <a:r>
-              <a:rPr sz="1300" b="1" i="0">
-                <a:solidFill>
-                  <a:srgbClr val="006E96"/>
-                </a:solidFill>
-                <a:latin typeface="Arial"/>
-              </a:rPr>
-              <a:t>KP1 · Government Enterprise Architecture · Module 5 · Video 5.1</a:t>
-            </a:r>
-          </a:p>
-          <a:p>
-            <a:r>
-              <a:rPr sz="1200" b="0" i="1">
-                <a:solidFill>
-                  <a:srgbClr val="595959"/>
-                </a:solidFill>
-                <a:latin typeface="Arial"/>
-              </a:rPr>
-              <a:t>This is not a theory waiting for its first trial. Across four very different governments, the same architectural approach has already produced results — which means the question for you is not whether it works, but how to apply it where you are.</a:t>
-            </a:r>
-          </a:p>
-        </p:txBody>
-      </p:sp>
-      <p:sp>
-        <p:nvSpPr>
-          <p:cNvPr id="17" name="Title 9">
-            <a:extLst>
-              <a:ext uri="{FF2B5EF4-FFF2-40B4-BE49-F238E27FC236}">
-                <a16:creationId xmlns:a16="http://schemas.microsoft.com/office/drawing/2014/main" id="{5E8796F7-DD26-D250-5E97-B38B22298E72}"/>
-              </a:ext>
-            </a:extLst>
-          </p:cNvPr>
-          <p:cNvSpPr txBox="1">
-            <a:spLocks/>
-          </p:cNvSpPr>
-          <p:nvPr/>
-        </p:nvSpPr>
-        <p:spPr>
-          <a:xfrm>
-            <a:off x="284452" y="4363897"/>
-            <a:ext cx="6382893" cy="953213"/>
-          </a:xfrm>
-          <a:prstGeom prst="rect">
-            <a:avLst/>
-          </a:prstGeom>
-        </p:spPr>
-        <p:txBody>
-          <a:bodyPr anchor="t">
-            <a:noAutofit/>
-          </a:bodyPr>
-          <a:lstStyle>
-            <a:lvl1pPr algn="l" defTabSz="914400" rtl="0" eaLnBrk="1" latinLnBrk="0" hangingPunct="1">
-              <a:lnSpc>
-                <a:spcPct val="90000"/>
-              </a:lnSpc>
-              <a:spcBef>
-                <a:spcPct val="0"/>
-              </a:spcBef>
-              <a:buNone/>
-              <a:defRPr sz="4000" kern="1200">
-                <a:solidFill>
-                  <a:schemeClr val="bg1"/>
-                </a:solidFill>
-                <a:latin typeface="Arial" panose="020B0604020202020204" pitchFamily="34" charset="0"/>
-                <a:ea typeface="+mj-ea"/>
-                <a:cs typeface="Arial" panose="020B0604020202020204" pitchFamily="34" charset="0"/>
-              </a:defRPr>
-            </a:lvl1pPr>
-          </a:lstStyle>
-          <a:p>
-            <a:pPr marL="0" marR="0" lvl="0" indent="0" rtl="0">
-              <a:spcBef>
-                <a:spcPts val="600"/>
-              </a:spcBef>
-              <a:spcAft>
-                <a:spcPts val="1200"/>
-              </a:spcAft>
-              <a:buNone/>
-            </a:pPr>
-            <a:r>
-              <a:rPr sz="1400" b="1" i="0">
-                <a:solidFill>
-                  <a:srgbClr val="1A1A1A"/>
-                </a:solidFill>
-                <a:latin typeface="Arial"/>
-              </a:rPr>
-              <a:t>Length: </a:t>
-            </a:r>
-            <a:r>
-              <a:rPr sz="1400" b="0" i="0">
-                <a:solidFill>
-                  <a:srgbClr val="1A1A1A"/>
-                </a:solidFill>
-                <a:latin typeface="Arial"/>
-              </a:rPr>
-              <a:t>~4 mins</a:t>
-            </a:r>
-          </a:p>
-          <a:p>
-            <a:r>
-              <a:rPr sz="1400" b="1" i="0">
-                <a:solidFill>
-                  <a:srgbClr val="1A1A1A"/>
-                </a:solidFill>
-                <a:latin typeface="Arial"/>
-              </a:rPr>
-              <a:t>Target audience: </a:t>
-            </a:r>
-            <a:r>
-              <a:rPr sz="1400" b="0" i="0">
-                <a:solidFill>
-                  <a:srgbClr val="1A1A1A"/>
-                </a:solidFill>
-                <a:latin typeface="Arial"/>
-              </a:rPr>
-              <a:t>Director-general · head of a sectoral ICT unit · technical secretary</a:t>
-            </a:r>
-          </a:p>
-        </p:txBody>
-      </p:sp>
-      <p:sp>
-        <p:nvSpPr>
-          <p:cNvPr id="18" name="Rectangle 17"/>
+      <p:grpSpPr/>
+      <p:sp>
+        <p:nvSpPr>
+          <p:cNvPr id="2" name="Rectangle 1"/>
           <p:cNvSpPr/>
           <p:nvPr/>
         </p:nvSpPr>
         <p:spPr>
           <a:xfrm>
-            <a:off x="7022592" y="0"/>
-            <a:ext cx="5169103" cy="6858000"/>
+            <a:off x="457200" y="384048"/>
+            <a:ext cx="45720" cy="256032"/>
           </a:xfrm>
           <a:prstGeom prst="rect">
             <a:avLst/>
@@ -11992,14 +11670,14 @@
       </p:sp>
       <p:sp>
         <p:nvSpPr>
-          <p:cNvPr id="19" name="TextBox 18"/>
+          <p:cNvPr id="3" name="TextBox 2"/>
           <p:cNvSpPr txBox="1"/>
           <p:nvPr/>
         </p:nvSpPr>
         <p:spPr>
           <a:xfrm>
-            <a:off x="7452360" y="457200"/>
-            <a:ext cx="4297680" cy="457200"/>
+            <a:off x="621792" y="274320"/>
+            <a:ext cx="11247120" cy="914400"/>
           </a:xfrm>
           <a:prstGeom prst="rect">
             <a:avLst/>
@@ -12013,302 +11691,130 @@
           <a:lstStyle/>
           <a:p>
             <a:r>
-              <a:rPr sz="1100" b="1" i="0">
-                <a:solidFill>
-                  <a:srgbClr val="E5F5FB"/>
-                </a:solidFill>
-                <a:latin typeface="Arial"/>
-              </a:rPr>
-              <a:t>THE CASE YOU CARRY INTO THE ROOM</a:t>
-            </a:r>
-          </a:p>
-        </p:txBody>
-      </p:sp>
-      <p:sp>
-        <p:nvSpPr>
-          <p:cNvPr id="20" name="Rounded Rectangle 19"/>
-          <p:cNvSpPr/>
-          <p:nvPr/>
-        </p:nvSpPr>
-        <p:spPr>
-          <a:xfrm>
-            <a:off x="7452360" y="960120"/>
-            <a:ext cx="3840480" cy="658368"/>
-          </a:xfrm>
-          <a:prstGeom prst="roundRect">
-            <a:avLst>
-              <a:gd name="adj" fmla="val 14000"/>
-            </a:avLst>
-          </a:prstGeom>
-          <a:solidFill>
-            <a:srgbClr val="FFFFFF"/>
-          </a:solidFill>
-          <a:ln>
-            <a:noFill/>
-          </a:ln>
-          <a:effectLst/>
-        </p:spPr>
-        <p:style>
-          <a:lnRef idx="1">
-            <a:schemeClr val="accent1"/>
-          </a:lnRef>
-          <a:fillRef idx="3">
-            <a:schemeClr val="accent1"/>
-          </a:fillRef>
-          <a:effectRef idx="2">
-            <a:schemeClr val="accent1"/>
-          </a:effectRef>
-          <a:fontRef idx="minor">
-            <a:schemeClr val="lt1"/>
-          </a:fontRef>
-        </p:style>
-        <p:txBody>
-          <a:bodyPr rtlCol="0" anchor="ctr" lIns="164592" wrap="square"/>
-          <a:lstStyle/>
-          <a:p>
-            <a:pPr algn="ctr"/>
-            <a:r>
-              <a:rPr sz="1500" b="1" i="0">
+              <a:rPr sz="2800" b="1" i="0">
                 <a:solidFill>
                   <a:srgbClr val="1A1A1A"/>
                 </a:solidFill>
                 <a:latin typeface="Arial"/>
               </a:rPr>
-              <a:t>Proven — four real governments</a:t>
-            </a:r>
-          </a:p>
-        </p:txBody>
-      </p:sp>
-      <p:sp>
-        <p:nvSpPr>
-          <p:cNvPr id="21" name="Rounded Rectangle 20"/>
-          <p:cNvSpPr/>
+              <a:t>Sources</a:t>
+            </a:r>
+          </a:p>
+        </p:txBody>
+      </p:sp>
+      <p:sp>
+        <p:nvSpPr>
+          <p:cNvPr id="4" name="TextBox 3"/>
+          <p:cNvSpPr txBox="1"/>
           <p:nvPr/>
         </p:nvSpPr>
         <p:spPr>
           <a:xfrm>
-            <a:off x="7452360" y="1892808"/>
-            <a:ext cx="3840480" cy="658368"/>
-          </a:xfrm>
-          <a:prstGeom prst="roundRect">
-            <a:avLst>
-              <a:gd name="adj" fmla="val 14000"/>
-            </a:avLst>
+            <a:off x="658368" y="1554480"/>
+            <a:ext cx="10789920" cy="3840480"/>
+          </a:xfrm>
+          <a:prstGeom prst="rect">
+            <a:avLst/>
           </a:prstGeom>
-          <a:solidFill>
-            <a:srgbClr val="FFFFFF"/>
-          </a:solidFill>
-          <a:ln>
-            <a:noFill/>
-          </a:ln>
-          <a:effectLst/>
-        </p:spPr>
-        <p:style>
-          <a:lnRef idx="1">
-            <a:schemeClr val="accent1"/>
-          </a:lnRef>
-          <a:fillRef idx="3">
-            <a:schemeClr val="accent1"/>
-          </a:fillRef>
-          <a:effectRef idx="2">
-            <a:schemeClr val="accent1"/>
-          </a:effectRef>
-          <a:fontRef idx="minor">
-            <a:schemeClr val="lt1"/>
-          </a:fontRef>
-        </p:style>
-        <p:txBody>
-          <a:bodyPr rtlCol="0" anchor="ctr" lIns="164592" wrap="square"/>
+          <a:noFill/>
+        </p:spPr>
+        <p:txBody>
+          <a:bodyPr wrap="square">
+            <a:spAutoFit/>
+          </a:bodyPr>
           <a:lstStyle/>
           <a:p>
-            <a:pPr algn="ctr"/>
-            <a:r>
-              <a:rPr sz="1500" b="1" i="0">
+            <a:pPr>
+              <a:spcAft>
+                <a:spcPts val="1200"/>
+              </a:spcAft>
+            </a:pPr>
+            <a:r>
+              <a:rPr sz="1700" b="0" i="0">
                 <a:solidFill>
                   <a:srgbClr val="1A1A1A"/>
                 </a:solidFill>
                 <a:latin typeface="Arial"/>
               </a:rPr>
-              <a:t>Portable — sector after sector</a:t>
-            </a:r>
-          </a:p>
-        </p:txBody>
-      </p:sp>
-      <p:sp>
-        <p:nvSpPr>
-          <p:cNvPr id="22" name="Rounded Rectangle 21"/>
-          <p:cNvSpPr/>
-          <p:nvPr/>
-        </p:nvSpPr>
-        <p:spPr>
-          <a:xfrm>
-            <a:off x="7452360" y="2825496"/>
-            <a:ext cx="3840480" cy="658368"/>
-          </a:xfrm>
-          <a:prstGeom prst="roundRect">
-            <a:avLst>
-              <a:gd name="adj" fmla="val 14000"/>
-            </a:avLst>
-          </a:prstGeom>
-          <a:solidFill>
-            <a:srgbClr val="FFFFFF"/>
-          </a:solidFill>
-          <a:ln>
-            <a:noFill/>
-          </a:ln>
-          <a:effectLst/>
-        </p:spPr>
-        <p:style>
-          <a:lnRef idx="1">
-            <a:schemeClr val="accent1"/>
-          </a:lnRef>
-          <a:fillRef idx="3">
-            <a:schemeClr val="accent1"/>
-          </a:fillRef>
-          <a:effectRef idx="2">
-            <a:schemeClr val="accent1"/>
-          </a:effectRef>
-          <a:fontRef idx="minor">
-            <a:schemeClr val="lt1"/>
-          </a:fontRef>
-        </p:style>
-        <p:txBody>
-          <a:bodyPr rtlCol="0" anchor="ctr" lIns="164592" wrap="square"/>
-          <a:lstStyle/>
-          <a:p>
-            <a:pPr algn="ctr"/>
-            <a:r>
-              <a:rPr sz="1500" b="1" i="0">
+              <a:t>•  Rwanda — Irembo (irembo.gov.rw)</a:t>
+            </a:r>
+          </a:p>
+          <a:p>
+            <a:pPr>
+              <a:spcAft>
+                <a:spcPts val="1200"/>
+              </a:spcAft>
+            </a:pPr>
+            <a:r>
+              <a:rPr sz="1700" b="0" i="0">
                 <a:solidFill>
                   <a:srgbClr val="1A1A1A"/>
                 </a:solidFill>
                 <a:latin typeface="Arial"/>
               </a:rPr>
-              <a:t>The commitment — the one page</a:t>
-            </a:r>
-          </a:p>
-        </p:txBody>
-      </p:sp>
-      <p:sp>
-        <p:nvSpPr>
-          <p:cNvPr id="23" name="Rounded Rectangle 22"/>
-          <p:cNvSpPr/>
-          <p:nvPr/>
-        </p:nvSpPr>
-        <p:spPr>
-          <a:xfrm>
-            <a:off x="7452360" y="3758184"/>
-            <a:ext cx="3840480" cy="658368"/>
-          </a:xfrm>
-          <a:prstGeom prst="roundRect">
-            <a:avLst>
-              <a:gd name="adj" fmla="val 14000"/>
-            </a:avLst>
-          </a:prstGeom>
-          <a:solidFill>
-            <a:srgbClr val="FFFFFF"/>
-          </a:solidFill>
-          <a:ln>
-            <a:noFill/>
-          </a:ln>
-          <a:effectLst/>
-        </p:spPr>
-        <p:style>
-          <a:lnRef idx="1">
-            <a:schemeClr val="accent1"/>
-          </a:lnRef>
-          <a:fillRef idx="3">
-            <a:schemeClr val="accent1"/>
-          </a:fillRef>
-          <a:effectRef idx="2">
-            <a:schemeClr val="accent1"/>
-          </a:effectRef>
-          <a:fontRef idx="minor">
-            <a:schemeClr val="lt1"/>
-          </a:fontRef>
-        </p:style>
-        <p:txBody>
-          <a:bodyPr rtlCol="0" anchor="ctr" lIns="164592" wrap="square"/>
-          <a:lstStyle/>
-          <a:p>
-            <a:pPr algn="ctr"/>
-            <a:r>
-              <a:rPr sz="1500" b="1" i="0">
+              <a:t>•  Kenya — Huduma Kenya (huduma.go.ke)</a:t>
+            </a:r>
+          </a:p>
+          <a:p>
+            <a:pPr>
+              <a:spcAft>
+                <a:spcPts val="1200"/>
+              </a:spcAft>
+            </a:pPr>
+            <a:r>
+              <a:rPr sz="1700" b="0" i="0">
                 <a:solidFill>
                   <a:srgbClr val="1A1A1A"/>
                 </a:solidFill>
                 <a:latin typeface="Arial"/>
               </a:rPr>
-              <a:t>The capability — your own people</a:t>
-            </a:r>
-          </a:p>
-        </p:txBody>
-      </p:sp>
-      <p:sp>
-        <p:nvSpPr>
-          <p:cNvPr id="24" name="Rounded Rectangle 23"/>
-          <p:cNvSpPr/>
-          <p:nvPr/>
-        </p:nvSpPr>
-        <p:spPr>
-          <a:xfrm>
-            <a:off x="7452360" y="4690872"/>
-            <a:ext cx="3840480" cy="658368"/>
-          </a:xfrm>
-          <a:prstGeom prst="roundRect">
-            <a:avLst>
-              <a:gd name="adj" fmla="val 14000"/>
-            </a:avLst>
-          </a:prstGeom>
-          <a:solidFill>
-            <a:srgbClr val="006E96"/>
-          </a:solidFill>
-          <a:ln>
-            <a:noFill/>
-          </a:ln>
-          <a:effectLst/>
-        </p:spPr>
-        <p:style>
-          <a:lnRef idx="1">
-            <a:schemeClr val="accent1"/>
-          </a:lnRef>
-          <a:fillRef idx="3">
-            <a:schemeClr val="accent1"/>
-          </a:fillRef>
-          <a:effectRef idx="2">
-            <a:schemeClr val="accent1"/>
-          </a:effectRef>
-          <a:fontRef idx="minor">
-            <a:schemeClr val="lt1"/>
-          </a:fontRef>
-        </p:style>
-        <p:txBody>
-          <a:bodyPr rtlCol="0" anchor="ctr" lIns="164592" wrap="square"/>
-          <a:lstStyle/>
-          <a:p>
-            <a:pPr algn="ctr"/>
-            <a:r>
-              <a:rPr sz="1500" b="1" i="0">
+              <a:t>•  South Africa — SITA (sita.co.za)</a:t>
+            </a:r>
+          </a:p>
+          <a:p>
+            <a:pPr>
+              <a:spcAft>
+                <a:spcPts val="1200"/>
+              </a:spcAft>
+            </a:pPr>
+            <a:r>
+              <a:rPr sz="1700" b="0" i="0">
                 <a:solidFill>
-                  <a:srgbClr val="FFFFFF"/>
+                  <a:srgbClr val="1A1A1A"/>
                 </a:solidFill>
                 <a:latin typeface="Arial"/>
               </a:rPr>
-              <a:t>Necessary now, not just useful</a:t>
-            </a:r>
-          </a:p>
-        </p:txBody>
-      </p:sp>
-      <p:sp>
-        <p:nvSpPr>
-          <p:cNvPr id="25" name="TextBox 24"/>
+              <a:t>•  Estonia — e-Estonia.com and RIA (ria.ee)</a:t>
+            </a:r>
+          </a:p>
+          <a:p>
+            <a:pPr>
+              <a:spcAft>
+                <a:spcPts val="1200"/>
+              </a:spcAft>
+            </a:pPr>
+            <a:r>
+              <a:rPr sz="1700" b="0" i="0">
+                <a:solidFill>
+                  <a:srgbClr val="1A1A1A"/>
+                </a:solidFill>
+                <a:latin typeface="Arial"/>
+              </a:rPr>
+              <a:t>•  PAERA v1.0 — §5.7 (Recommended Roadmap); §2.1 (Problem statement)</a:t>
+            </a:r>
+          </a:p>
+        </p:txBody>
+      </p:sp>
+      <p:sp>
+        <p:nvSpPr>
+          <p:cNvPr id="5" name="TextBox 4"/>
           <p:cNvSpPr txBox="1"/>
           <p:nvPr/>
         </p:nvSpPr>
         <p:spPr>
           <a:xfrm>
-            <a:off x="7452360" y="5806440"/>
-            <a:ext cx="4297680" cy="731520"/>
+            <a:off x="658368" y="5806440"/>
+            <a:ext cx="10789920" cy="457200"/>
           </a:xfrm>
           <a:prstGeom prst="rect">
             <a:avLst/>
@@ -12322,23 +11828,52 @@
           <a:lstStyle/>
           <a:p>
             <a:r>
-              <a:rPr sz="1200" b="0" i="0">
+              <a:rPr sz="1400" b="1" i="0">
                 <a:solidFill>
-                  <a:srgbClr val="FFFFFF"/>
+                  <a:srgbClr val="006E96"/>
                 </a:solidFill>
                 <a:latin typeface="Arial"/>
               </a:rPr>
-              <a:t>4 governments · 4 killers to design out · 1 page for the minister</a:t>
+              <a:t>Find the link in the description.</a:t>
+            </a:r>
+          </a:p>
+        </p:txBody>
+      </p:sp>
+      <p:sp>
+        <p:nvSpPr>
+          <p:cNvPr id="6" name="TextBox 5"/>
+          <p:cNvSpPr txBox="1"/>
+          <p:nvPr/>
+        </p:nvSpPr>
+        <p:spPr>
+          <a:xfrm>
+            <a:off x="457200" y="6473952"/>
+            <a:ext cx="7772400" cy="292608"/>
+          </a:xfrm>
+          <a:prstGeom prst="rect">
+            <a:avLst/>
+          </a:prstGeom>
+          <a:noFill/>
+        </p:spPr>
+        <p:txBody>
+          <a:bodyPr wrap="square">
+            <a:spAutoFit/>
+          </a:bodyPr>
+          <a:lstStyle/>
+          <a:p>
+            <a:r>
+              <a:rPr sz="900" b="0" i="0">
+                <a:solidFill>
+                  <a:srgbClr val="595959"/>
+                </a:solidFill>
+                <a:latin typeface="Arial"/>
+              </a:rPr>
+              <a:t>5.1 · Is this proven, or just theory? — evidence from real programmes</a:t>
             </a:r>
           </a:p>
         </p:txBody>
       </p:sp>
     </p:spTree>
-    <p:extLst>
-      <p:ext uri="{BB962C8B-B14F-4D97-AF65-F5344CB8AC3E}">
-        <p14:creationId xmlns:p14="http://schemas.microsoft.com/office/powerpoint/2010/main" val="1196800265"/>
-      </p:ext>
-    </p:extLst>
   </p:cSld>
   <p:clrMapOvr>
     <a:masterClrMapping/>
@@ -12546,58 +12081,14 @@
       <p:grpSpPr/>
       <p:sp>
         <p:nvSpPr>
-          <p:cNvPr id="2" name="Rectangle 1"/>
-          <p:cNvSpPr/>
-          <p:nvPr/>
-        </p:nvSpPr>
-        <p:spPr>
-          <a:xfrm>
-            <a:off x="457200" y="384048"/>
-            <a:ext cx="45720" cy="256032"/>
-          </a:xfrm>
-          <a:prstGeom prst="rect">
-            <a:avLst/>
-          </a:prstGeom>
-          <a:solidFill>
-            <a:srgbClr val="009CD6"/>
-          </a:solidFill>
-          <a:ln>
-            <a:noFill/>
-          </a:ln>
-          <a:effectLst/>
-        </p:spPr>
-        <p:style>
-          <a:lnRef idx="1">
-            <a:schemeClr val="accent1"/>
-          </a:lnRef>
-          <a:fillRef idx="3">
-            <a:schemeClr val="accent1"/>
-          </a:fillRef>
-          <a:effectRef idx="2">
-            <a:schemeClr val="accent1"/>
-          </a:effectRef>
-          <a:fontRef idx="minor">
-            <a:schemeClr val="lt1"/>
-          </a:fontRef>
-        </p:style>
-        <p:txBody>
-          <a:bodyPr rtlCol="0" anchor="ctr"/>
-          <a:lstStyle/>
-          <a:p>
-            <a:pPr algn="ctr"/>
-          </a:p>
-        </p:txBody>
-      </p:sp>
-      <p:sp>
-        <p:nvSpPr>
-          <p:cNvPr id="3" name="TextBox 2"/>
+          <p:cNvPr id="2" name="TextBox 1"/>
           <p:cNvSpPr txBox="1"/>
           <p:nvPr/>
         </p:nvSpPr>
         <p:spPr>
           <a:xfrm>
-            <a:off x="621792" y="274320"/>
-            <a:ext cx="11247120" cy="914400"/>
+            <a:off x="1005840" y="1325880"/>
+            <a:ext cx="5486400" cy="365760"/>
           </a:xfrm>
           <a:prstGeom prst="rect">
             <a:avLst/>
@@ -12611,13 +12102,47 @@
           <a:lstStyle/>
           <a:p>
             <a:r>
-              <a:rPr sz="2800" b="1" i="0">
+              <a:rPr sz="1200" b="1" i="0">
+                <a:solidFill>
+                  <a:srgbClr val="006E96"/>
+                </a:solidFill>
+                <a:latin typeface="Arial"/>
+              </a:rPr>
+              <a:t>WHERE WE START</a:t>
+            </a:r>
+          </a:p>
+        </p:txBody>
+      </p:sp>
+      <p:sp>
+        <p:nvSpPr>
+          <p:cNvPr id="3" name="TextBox 2"/>
+          <p:cNvSpPr txBox="1"/>
+          <p:nvPr/>
+        </p:nvSpPr>
+        <p:spPr>
+          <a:xfrm>
+            <a:off x="1005840" y="1783080"/>
+            <a:ext cx="10149840" cy="1737360"/>
+          </a:xfrm>
+          <a:prstGeom prst="rect">
+            <a:avLst/>
+          </a:prstGeom>
+          <a:noFill/>
+        </p:spPr>
+        <p:txBody>
+          <a:bodyPr wrap="square">
+            <a:spAutoFit/>
+          </a:bodyPr>
+          <a:lstStyle/>
+          <a:p>
+            <a:r>
+              <a:rPr sz="3000" b="1" i="0">
                 <a:solidFill>
                   <a:srgbClr val="1A1A1A"/>
                 </a:solidFill>
                 <a:latin typeface="Arial"/>
               </a:rPr>
-              <a:t>Four governments, four shapes</a:t>
+              <a:t>Is this proven, or a consultant’s theory?</a:t>
             </a:r>
           </a:p>
         </p:txBody>
@@ -12630,8 +12155,8 @@
         </p:nvSpPr>
         <p:spPr>
           <a:xfrm>
-            <a:off x="658368" y="1463040"/>
-            <a:ext cx="10984687" cy="1028699"/>
+            <a:off x="1005840" y="3611880"/>
+            <a:ext cx="10149840" cy="2377440"/>
           </a:xfrm>
           <a:prstGeom prst="rect">
             <a:avLst/>
@@ -12646,371 +12171,40 @@
           <a:p>
             <a:pPr>
               <a:spcAft>
-                <a:spcPts val="300"/>
+                <a:spcPts val="800"/>
               </a:spcAft>
             </a:pPr>
             <a:r>
-              <a:rPr sz="1900" b="1" i="0">
-                <a:solidFill>
-                  <a:srgbClr val="1A1A1A"/>
-                </a:solidFill>
-                <a:latin typeface="Arial"/>
-              </a:rPr>
-              <a:t>Rwanda — small, with a strong centre</a:t>
-            </a:r>
-          </a:p>
-          <a:p>
-            <a:pPr>
-              <a:spcAft>
-                <a:spcPts val="300"/>
-              </a:spcAft>
-            </a:pPr>
-            <a:r>
-              <a:rPr sz="1550" b="0" i="0">
+              <a:rPr sz="1700" b="0" i="0">
                 <a:solidFill>
                   <a:srgbClr val="595959"/>
                 </a:solidFill>
                 <a:latin typeface="Arial"/>
               </a:rPr>
-              <a:t>One citizen-services platform; a national identity linked across services.</a:t>
-            </a:r>
-          </a:p>
-        </p:txBody>
-      </p:sp>
-      <p:sp>
-        <p:nvSpPr>
-          <p:cNvPr id="5" name="Rectangle 4"/>
-          <p:cNvSpPr/>
-          <p:nvPr/>
-        </p:nvSpPr>
-        <p:spPr>
-          <a:xfrm>
-            <a:off x="621792" y="2496312"/>
-            <a:ext cx="10881360" cy="12700"/>
-          </a:xfrm>
-          <a:prstGeom prst="rect">
-            <a:avLst/>
-          </a:prstGeom>
-          <a:solidFill>
-            <a:srgbClr val="DDECF4"/>
-          </a:solidFill>
-          <a:ln>
-            <a:noFill/>
-          </a:ln>
-          <a:effectLst/>
-        </p:spPr>
-        <p:style>
-          <a:lnRef idx="1">
-            <a:schemeClr val="accent1"/>
-          </a:lnRef>
-          <a:fillRef idx="3">
-            <a:schemeClr val="accent1"/>
-          </a:fillRef>
-          <a:effectRef idx="2">
-            <a:schemeClr val="accent1"/>
-          </a:effectRef>
-          <a:fontRef idx="minor">
-            <a:schemeClr val="lt1"/>
-          </a:fontRef>
-        </p:style>
-        <p:txBody>
-          <a:bodyPr rtlCol="0" anchor="ctr"/>
-          <a:lstStyle/>
-          <a:p>
-            <a:pPr algn="ctr"/>
-          </a:p>
-        </p:txBody>
-      </p:sp>
-      <p:sp>
-        <p:nvSpPr>
-          <p:cNvPr id="6" name="TextBox 5"/>
-          <p:cNvSpPr txBox="1"/>
-          <p:nvPr/>
-        </p:nvSpPr>
-        <p:spPr>
-          <a:xfrm>
-            <a:off x="658368" y="2537460"/>
-            <a:ext cx="10984687" cy="1028699"/>
-          </a:xfrm>
-          <a:prstGeom prst="rect">
-            <a:avLst/>
-          </a:prstGeom>
-          <a:noFill/>
-        </p:spPr>
-        <p:txBody>
-          <a:bodyPr wrap="square">
-            <a:spAutoFit/>
-          </a:bodyPr>
-          <a:lstStyle/>
+              <a:t>You are right to ask before you commit your agency.</a:t>
+            </a:r>
+          </a:p>
           <a:p>
             <a:pPr>
               <a:spcAft>
-                <a:spcPts val="300"/>
+                <a:spcPts val="800"/>
               </a:spcAft>
             </a:pPr>
             <a:r>
-              <a:rPr sz="1900" b="1" i="0">
-                <a:solidFill>
-                  <a:srgbClr val="1A1A1A"/>
-                </a:solidFill>
-                <a:latin typeface="Arial"/>
-              </a:rPr>
-              <a:t>Kenya — one-stop centres and a unifying identity programme</a:t>
-            </a:r>
-          </a:p>
-          <a:p>
-            <a:pPr>
-              <a:spcAft>
-                <a:spcPts val="300"/>
-              </a:spcAft>
-            </a:pPr>
-            <a:r>
-              <a:rPr sz="1550" b="0" i="0">
+              <a:rPr sz="1700" b="0" i="0">
                 <a:solidFill>
                   <a:srgbClr val="595959"/>
                 </a:solidFill>
                 <a:latin typeface="Arial"/>
               </a:rPr>
-              <a:t>Results mixed and openly debated.</a:t>
-            </a:r>
-          </a:p>
-        </p:txBody>
-      </p:sp>
-      <p:sp>
-        <p:nvSpPr>
-          <p:cNvPr id="7" name="Rectangle 6"/>
-          <p:cNvSpPr/>
-          <p:nvPr/>
-        </p:nvSpPr>
-        <p:spPr>
-          <a:xfrm>
-            <a:off x="621792" y="3570732"/>
-            <a:ext cx="10881360" cy="12700"/>
-          </a:xfrm>
-          <a:prstGeom prst="rect">
-            <a:avLst/>
-          </a:prstGeom>
-          <a:solidFill>
-            <a:srgbClr val="DDECF4"/>
-          </a:solidFill>
-          <a:ln>
-            <a:noFill/>
-          </a:ln>
-          <a:effectLst/>
-        </p:spPr>
-        <p:style>
-          <a:lnRef idx="1">
-            <a:schemeClr val="accent1"/>
-          </a:lnRef>
-          <a:fillRef idx="3">
-            <a:schemeClr val="accent1"/>
-          </a:fillRef>
-          <a:effectRef idx="2">
-            <a:schemeClr val="accent1"/>
-          </a:effectRef>
-          <a:fontRef idx="minor">
-            <a:schemeClr val="lt1"/>
-          </a:fontRef>
-        </p:style>
-        <p:txBody>
-          <a:bodyPr rtlCol="0" anchor="ctr"/>
-          <a:lstStyle/>
-          <a:p>
-            <a:pPr algn="ctr"/>
-          </a:p>
-        </p:txBody>
-      </p:sp>
-      <p:sp>
-        <p:nvSpPr>
-          <p:cNvPr id="8" name="TextBox 7"/>
-          <p:cNvSpPr txBox="1"/>
-          <p:nvPr/>
-        </p:nvSpPr>
-        <p:spPr>
-          <a:xfrm>
-            <a:off x="658368" y="3611879"/>
-            <a:ext cx="10984687" cy="1028699"/>
-          </a:xfrm>
-          <a:prstGeom prst="rect">
-            <a:avLst/>
-          </a:prstGeom>
-          <a:noFill/>
-        </p:spPr>
-        <p:txBody>
-          <a:bodyPr wrap="square">
-            <a:spAutoFit/>
-          </a:bodyPr>
-          <a:lstStyle/>
-          <a:p>
-            <a:pPr>
-              <a:spcAft>
-                <a:spcPts val="300"/>
-              </a:spcAft>
-            </a:pPr>
-            <a:r>
-              <a:rPr sz="1900" b="1" i="0">
-                <a:solidFill>
-                  <a:srgbClr val="1A1A1A"/>
-                </a:solidFill>
-                <a:latin typeface="Arial"/>
-              </a:rPr>
-              <a:t>South Africa — federal, so nothing can be imposed from the top</a:t>
-            </a:r>
-          </a:p>
-          <a:p>
-            <a:pPr>
-              <a:spcAft>
-                <a:spcPts val="300"/>
-              </a:spcAft>
-            </a:pPr>
-            <a:r>
-              <a:rPr sz="1550" b="0" i="0">
-                <a:solidFill>
-                  <a:srgbClr val="595959"/>
-                </a:solidFill>
-                <a:latin typeface="Arial"/>
-              </a:rPr>
-              <a:t>Coordinated instead through a central agency and shared standards.</a:t>
-            </a:r>
-          </a:p>
-        </p:txBody>
-      </p:sp>
-      <p:sp>
-        <p:nvSpPr>
-          <p:cNvPr id="9" name="Rectangle 8"/>
-          <p:cNvSpPr/>
-          <p:nvPr/>
-        </p:nvSpPr>
-        <p:spPr>
-          <a:xfrm>
-            <a:off x="621792" y="4645152"/>
-            <a:ext cx="10881360" cy="12700"/>
-          </a:xfrm>
-          <a:prstGeom prst="rect">
-            <a:avLst/>
-          </a:prstGeom>
-          <a:solidFill>
-            <a:srgbClr val="DDECF4"/>
-          </a:solidFill>
-          <a:ln>
-            <a:noFill/>
-          </a:ln>
-          <a:effectLst/>
-        </p:spPr>
-        <p:style>
-          <a:lnRef idx="1">
-            <a:schemeClr val="accent1"/>
-          </a:lnRef>
-          <a:fillRef idx="3">
-            <a:schemeClr val="accent1"/>
-          </a:fillRef>
-          <a:effectRef idx="2">
-            <a:schemeClr val="accent1"/>
-          </a:effectRef>
-          <a:fontRef idx="minor">
-            <a:schemeClr val="lt1"/>
-          </a:fontRef>
-        </p:style>
-        <p:txBody>
-          <a:bodyPr rtlCol="0" anchor="ctr"/>
-          <a:lstStyle/>
-          <a:p>
-            <a:pPr algn="ctr"/>
-          </a:p>
-        </p:txBody>
-      </p:sp>
-      <p:sp>
-        <p:nvSpPr>
-          <p:cNvPr id="10" name="TextBox 9"/>
-          <p:cNvSpPr txBox="1"/>
-          <p:nvPr/>
-        </p:nvSpPr>
-        <p:spPr>
-          <a:xfrm>
-            <a:off x="658368" y="4686300"/>
-            <a:ext cx="10984687" cy="1028699"/>
-          </a:xfrm>
-          <a:prstGeom prst="rect">
-            <a:avLst/>
-          </a:prstGeom>
-          <a:noFill/>
-        </p:spPr>
-        <p:txBody>
-          <a:bodyPr wrap="square">
-            <a:spAutoFit/>
-          </a:bodyPr>
-          <a:lstStyle/>
-          <a:p>
-            <a:pPr>
-              <a:spcAft>
-                <a:spcPts val="300"/>
-              </a:spcAft>
-            </a:pPr>
-            <a:r>
-              <a:rPr sz="1900" b="1" i="0">
-                <a:solidFill>
-                  <a:srgbClr val="1A1A1A"/>
-                </a:solidFill>
-                <a:latin typeface="Arial"/>
-              </a:rPr>
-              <a:t>Estonia — mature, and the reference the others are measured against</a:t>
-            </a:r>
-          </a:p>
-          <a:p>
-            <a:pPr>
-              <a:spcAft>
-                <a:spcPts val="300"/>
-              </a:spcAft>
-            </a:pPr>
-            <a:r>
-              <a:rPr sz="1550" b="0" i="0">
-                <a:solidFill>
-                  <a:srgbClr val="595959"/>
-                </a:solidFill>
-                <a:latin typeface="Arial"/>
-              </a:rPr>
-              <a:t>Distributed registries; the once-only principle; almost every service online.</a:t>
-            </a:r>
-          </a:p>
-        </p:txBody>
-      </p:sp>
-      <p:sp>
-        <p:nvSpPr>
-          <p:cNvPr id="11" name="TextBox 10"/>
-          <p:cNvSpPr txBox="1"/>
-          <p:nvPr/>
-        </p:nvSpPr>
-        <p:spPr>
-          <a:xfrm>
-            <a:off x="658368" y="5870448"/>
-            <a:ext cx="10881360" cy="548640"/>
-          </a:xfrm>
-          <a:prstGeom prst="rect">
-            <a:avLst/>
-          </a:prstGeom>
-          <a:noFill/>
-        </p:spPr>
-        <p:txBody>
-          <a:bodyPr wrap="square">
-            <a:spAutoFit/>
-          </a:bodyPr>
-          <a:lstStyle/>
-          <a:p>
-            <a:r>
-              <a:rPr sz="1550" b="1" i="0">
-                <a:solidFill>
-                  <a:srgbClr val="006E96"/>
-                </a:solidFill>
-                <a:latin typeface="Arial"/>
-              </a:rPr>
-              <a:t>Four governments that could hardly differ more in size, resources and shape.</a:t>
-            </a:r>
-          </a:p>
-        </p:txBody>
-      </p:sp>
-      <p:sp>
-        <p:nvSpPr>
-          <p:cNvPr id="12" name="TextBox 11"/>
+              <a:t>The core of it has already been done — in countries large and small, unitary and federal, well-resourced and not.</a:t>
+            </a:r>
+          </a:p>
+        </p:txBody>
+      </p:sp>
+      <p:sp>
+        <p:nvSpPr>
+          <p:cNvPr id="5" name="TextBox 4"/>
           <p:cNvSpPr txBox="1"/>
           <p:nvPr/>
         </p:nvSpPr>
@@ -13038,6 +12232,41 @@
                 <a:latin typeface="Arial"/>
               </a:rPr>
               <a:t>5.1 · Is this proven, or just theory? — evidence from real programmes</a:t>
+            </a:r>
+          </a:p>
+        </p:txBody>
+      </p:sp>
+      <p:sp>
+        <p:nvSpPr>
+          <p:cNvPr id="6" name="TextBox 5"/>
+          <p:cNvSpPr txBox="1"/>
+          <p:nvPr/>
+        </p:nvSpPr>
+        <p:spPr>
+          <a:xfrm>
+            <a:off x="10058400" y="6473952"/>
+            <a:ext cx="1673352" cy="292608"/>
+          </a:xfrm>
+          <a:prstGeom prst="rect">
+            <a:avLst/>
+          </a:prstGeom>
+          <a:noFill/>
+        </p:spPr>
+        <p:txBody>
+          <a:bodyPr wrap="square">
+            <a:spAutoFit/>
+          </a:bodyPr>
+          <a:lstStyle/>
+          <a:p>
+            <a:pPr algn="r"/>
+            <a:r>
+              <a:rPr sz="900" b="0" i="0">
+                <a:solidFill>
+                  <a:srgbClr val="595959"/>
+                </a:solidFill>
+                <a:latin typeface="Arial"/>
+              </a:rPr>
+              <a:t>www.itu.int</a:t>
             </a:r>
           </a:p>
         </p:txBody>
@@ -13133,27 +12362,82 @@
                 </a:solidFill>
                 <a:latin typeface="Arial"/>
               </a:rPr>
-              <a:t>The same four elements show in every one</a:t>
-            </a:r>
-          </a:p>
-        </p:txBody>
-      </p:sp>
-      <p:sp>
-        <p:nvSpPr>
-          <p:cNvPr id="4" name="Oval 3"/>
+              <a:t>Four governments, four shapes</a:t>
+            </a:r>
+          </a:p>
+        </p:txBody>
+      </p:sp>
+      <p:sp>
+        <p:nvSpPr>
+          <p:cNvPr id="4" name="TextBox 3"/>
+          <p:cNvSpPr txBox="1"/>
+          <p:nvPr/>
+        </p:nvSpPr>
+        <p:spPr>
+          <a:xfrm>
+            <a:off x="658368" y="1463040"/>
+            <a:ext cx="10984687" cy="1028699"/>
+          </a:xfrm>
+          <a:prstGeom prst="rect">
+            <a:avLst/>
+          </a:prstGeom>
+          <a:noFill/>
+        </p:spPr>
+        <p:txBody>
+          <a:bodyPr wrap="square">
+            <a:spAutoFit/>
+          </a:bodyPr>
+          <a:lstStyle/>
+          <a:p>
+            <a:pPr>
+              <a:spcAft>
+                <a:spcPts val="300"/>
+              </a:spcAft>
+            </a:pPr>
+            <a:r>
+              <a:rPr sz="1900" b="1" i="0">
+                <a:solidFill>
+                  <a:srgbClr val="1A1A1A"/>
+                </a:solidFill>
+                <a:latin typeface="Arial"/>
+              </a:rPr>
+              <a:t>Rwanda — small, with a strong centre</a:t>
+            </a:r>
+          </a:p>
+          <a:p>
+            <a:pPr>
+              <a:spcAft>
+                <a:spcPts val="300"/>
+              </a:spcAft>
+            </a:pPr>
+            <a:r>
+              <a:rPr sz="1550" b="0" i="0">
+                <a:solidFill>
+                  <a:srgbClr val="595959"/>
+                </a:solidFill>
+                <a:latin typeface="Arial"/>
+              </a:rPr>
+              <a:t>One citizen-services platform; a national identity linked across services.</a:t>
+            </a:r>
+          </a:p>
+        </p:txBody>
+      </p:sp>
+      <p:sp>
+        <p:nvSpPr>
+          <p:cNvPr id="5" name="Rectangle 4"/>
           <p:cNvSpPr/>
           <p:nvPr/>
         </p:nvSpPr>
         <p:spPr>
           <a:xfrm>
-            <a:off x="621792" y="1508760"/>
-            <a:ext cx="310896" cy="310896"/>
-          </a:xfrm>
-          <a:prstGeom prst="ellipse">
+            <a:off x="621792" y="2496312"/>
+            <a:ext cx="10881360" cy="12700"/>
+          </a:xfrm>
+          <a:prstGeom prst="rect">
             <a:avLst/>
           </a:prstGeom>
           <a:solidFill>
-            <a:srgbClr val="009CD6"/>
+            <a:srgbClr val="DDECF4"/>
           </a:solidFill>
           <a:ln>
             <a:noFill/>
@@ -13175,32 +12459,23 @@
           </a:fontRef>
         </p:style>
         <p:txBody>
-          <a:bodyPr rtlCol="0" anchor="ctr" lIns="0" rIns="0" tIns="0" bIns="0" wrap="square"/>
+          <a:bodyPr rtlCol="0" anchor="ctr"/>
           <a:lstStyle/>
           <a:p>
             <a:pPr algn="ctr"/>
-            <a:r>
-              <a:rPr sz="1300" b="1" i="0">
-                <a:solidFill>
-                  <a:srgbClr val="FFFFFF"/>
-                </a:solidFill>
-                <a:latin typeface="Arial"/>
-              </a:rPr>
-              <a:t>1</a:t>
-            </a:r>
-          </a:p>
-        </p:txBody>
-      </p:sp>
-      <p:sp>
-        <p:nvSpPr>
-          <p:cNvPr id="5" name="TextBox 4"/>
+          </a:p>
+        </p:txBody>
+      </p:sp>
+      <p:sp>
+        <p:nvSpPr>
+          <p:cNvPr id="6" name="TextBox 5"/>
           <p:cNvSpPr txBox="1"/>
           <p:nvPr/>
         </p:nvSpPr>
         <p:spPr>
           <a:xfrm>
-            <a:off x="1115568" y="1463040"/>
-            <a:ext cx="10527487" cy="1028699"/>
+            <a:off x="658368" y="2537460"/>
+            <a:ext cx="10984687" cy="1028699"/>
           </a:xfrm>
           <a:prstGeom prst="rect">
             <a:avLst/>
@@ -13225,7 +12500,7 @@
                 </a:solidFill>
                 <a:latin typeface="Arial"/>
               </a:rPr>
-              <a:t>A small central team with real authority</a:t>
+              <a:t>Kenya — one-stop centres and a unifying identity programme</a:t>
             </a:r>
           </a:p>
           <a:p>
@@ -13241,20 +12516,20 @@
                 </a:solidFill>
                 <a:latin typeface="Arial"/>
               </a:rPr>
-              <a:t>Not a committee, and not a contractor.</a:t>
-            </a:r>
-          </a:p>
-        </p:txBody>
-      </p:sp>
-      <p:sp>
-        <p:nvSpPr>
-          <p:cNvPr id="6" name="Rectangle 5"/>
+              <a:t>Results mixed and openly debated.</a:t>
+            </a:r>
+          </a:p>
+        </p:txBody>
+      </p:sp>
+      <p:sp>
+        <p:nvSpPr>
+          <p:cNvPr id="7" name="Rectangle 6"/>
           <p:cNvSpPr/>
           <p:nvPr/>
         </p:nvSpPr>
         <p:spPr>
           <a:xfrm>
-            <a:off x="621792" y="2496312"/>
+            <a:off x="621792" y="3570732"/>
             <a:ext cx="10881360" cy="12700"/>
           </a:xfrm>
           <a:prstGeom prst="rect">
@@ -13292,20 +12567,75 @@
       </p:sp>
       <p:sp>
         <p:nvSpPr>
-          <p:cNvPr id="7" name="Oval 6"/>
+          <p:cNvPr id="8" name="TextBox 7"/>
+          <p:cNvSpPr txBox="1"/>
+          <p:nvPr/>
+        </p:nvSpPr>
+        <p:spPr>
+          <a:xfrm>
+            <a:off x="658368" y="3611879"/>
+            <a:ext cx="10984687" cy="1028699"/>
+          </a:xfrm>
+          <a:prstGeom prst="rect">
+            <a:avLst/>
+          </a:prstGeom>
+          <a:noFill/>
+        </p:spPr>
+        <p:txBody>
+          <a:bodyPr wrap="square">
+            <a:spAutoFit/>
+          </a:bodyPr>
+          <a:lstStyle/>
+          <a:p>
+            <a:pPr>
+              <a:spcAft>
+                <a:spcPts val="300"/>
+              </a:spcAft>
+            </a:pPr>
+            <a:r>
+              <a:rPr sz="1900" b="1" i="0">
+                <a:solidFill>
+                  <a:srgbClr val="1A1A1A"/>
+                </a:solidFill>
+                <a:latin typeface="Arial"/>
+              </a:rPr>
+              <a:t>South Africa — federal, so nothing can be imposed from the top</a:t>
+            </a:r>
+          </a:p>
+          <a:p>
+            <a:pPr>
+              <a:spcAft>
+                <a:spcPts val="300"/>
+              </a:spcAft>
+            </a:pPr>
+            <a:r>
+              <a:rPr sz="1550" b="0" i="0">
+                <a:solidFill>
+                  <a:srgbClr val="595959"/>
+                </a:solidFill>
+                <a:latin typeface="Arial"/>
+              </a:rPr>
+              <a:t>Coordinated instead through a central agency and shared standards.</a:t>
+            </a:r>
+          </a:p>
+        </p:txBody>
+      </p:sp>
+      <p:sp>
+        <p:nvSpPr>
+          <p:cNvPr id="9" name="Rectangle 8"/>
           <p:cNvSpPr/>
           <p:nvPr/>
         </p:nvSpPr>
         <p:spPr>
           <a:xfrm>
-            <a:off x="621792" y="2583179"/>
-            <a:ext cx="310896" cy="310896"/>
-          </a:xfrm>
-          <a:prstGeom prst="ellipse">
+            <a:off x="621792" y="4645152"/>
+            <a:ext cx="10881360" cy="12700"/>
+          </a:xfrm>
+          <a:prstGeom prst="rect">
             <a:avLst/>
           </a:prstGeom>
           <a:solidFill>
-            <a:srgbClr val="009CD6"/>
+            <a:srgbClr val="DDECF4"/>
           </a:solidFill>
           <a:ln>
             <a:noFill/>
@@ -13327,32 +12657,23 @@
           </a:fontRef>
         </p:style>
         <p:txBody>
-          <a:bodyPr rtlCol="0" anchor="ctr" lIns="0" rIns="0" tIns="0" bIns="0" wrap="square"/>
+          <a:bodyPr rtlCol="0" anchor="ctr"/>
           <a:lstStyle/>
           <a:p>
             <a:pPr algn="ctr"/>
-            <a:r>
-              <a:rPr sz="1300" b="1" i="0">
-                <a:solidFill>
-                  <a:srgbClr val="FFFFFF"/>
-                </a:solidFill>
-                <a:latin typeface="Arial"/>
-              </a:rPr>
-              <a:t>2</a:t>
-            </a:r>
-          </a:p>
-        </p:txBody>
-      </p:sp>
-      <p:sp>
-        <p:nvSpPr>
-          <p:cNvPr id="8" name="TextBox 7"/>
+          </a:p>
+        </p:txBody>
+      </p:sp>
+      <p:sp>
+        <p:nvSpPr>
+          <p:cNvPr id="10" name="TextBox 9"/>
           <p:cNvSpPr txBox="1"/>
           <p:nvPr/>
         </p:nvSpPr>
         <p:spPr>
           <a:xfrm>
-            <a:off x="1115568" y="2537460"/>
-            <a:ext cx="10527487" cy="1028699"/>
+            <a:off x="658368" y="4686300"/>
+            <a:ext cx="10984687" cy="1028699"/>
           </a:xfrm>
           <a:prstGeom prst="rect">
             <a:avLst/>
@@ -13377,7 +12698,7 @@
                 </a:solidFill>
                 <a:latin typeface="Arial"/>
               </a:rPr>
-              <a:t>A published framework other agencies adopt</a:t>
+              <a:t>Estonia — mature, and the reference the others are measured against</a:t>
             </a:r>
           </a:p>
           <a:p>
@@ -13393,104 +12714,7 @@
                 </a:solidFill>
                 <a:latin typeface="Arial"/>
               </a:rPr>
-              <a:t>Adopted because it helps them, not because it is forced on them.</a:t>
-            </a:r>
-          </a:p>
-        </p:txBody>
-      </p:sp>
-      <p:sp>
-        <p:nvSpPr>
-          <p:cNvPr id="9" name="Rectangle 8"/>
-          <p:cNvSpPr/>
-          <p:nvPr/>
-        </p:nvSpPr>
-        <p:spPr>
-          <a:xfrm>
-            <a:off x="621792" y="3570732"/>
-            <a:ext cx="10881360" cy="12700"/>
-          </a:xfrm>
-          <a:prstGeom prst="rect">
-            <a:avLst/>
-          </a:prstGeom>
-          <a:solidFill>
-            <a:srgbClr val="DDECF4"/>
-          </a:solidFill>
-          <a:ln>
-            <a:noFill/>
-          </a:ln>
-          <a:effectLst/>
-        </p:spPr>
-        <p:style>
-          <a:lnRef idx="1">
-            <a:schemeClr val="accent1"/>
-          </a:lnRef>
-          <a:fillRef idx="3">
-            <a:schemeClr val="accent1"/>
-          </a:fillRef>
-          <a:effectRef idx="2">
-            <a:schemeClr val="accent1"/>
-          </a:effectRef>
-          <a:fontRef idx="minor">
-            <a:schemeClr val="lt1"/>
-          </a:fontRef>
-        </p:style>
-        <p:txBody>
-          <a:bodyPr rtlCol="0" anchor="ctr"/>
-          <a:lstStyle/>
-          <a:p>
-            <a:pPr algn="ctr"/>
-          </a:p>
-        </p:txBody>
-      </p:sp>
-      <p:sp>
-        <p:nvSpPr>
-          <p:cNvPr id="10" name="Oval 9"/>
-          <p:cNvSpPr/>
-          <p:nvPr/>
-        </p:nvSpPr>
-        <p:spPr>
-          <a:xfrm>
-            <a:off x="621792" y="3657599"/>
-            <a:ext cx="310896" cy="310896"/>
-          </a:xfrm>
-          <a:prstGeom prst="ellipse">
-            <a:avLst/>
-          </a:prstGeom>
-          <a:solidFill>
-            <a:srgbClr val="009CD6"/>
-          </a:solidFill>
-          <a:ln>
-            <a:noFill/>
-          </a:ln>
-          <a:effectLst/>
-        </p:spPr>
-        <p:style>
-          <a:lnRef idx="1">
-            <a:schemeClr val="accent1"/>
-          </a:lnRef>
-          <a:fillRef idx="3">
-            <a:schemeClr val="accent1"/>
-          </a:fillRef>
-          <a:effectRef idx="2">
-            <a:schemeClr val="accent1"/>
-          </a:effectRef>
-          <a:fontRef idx="minor">
-            <a:schemeClr val="lt1"/>
-          </a:fontRef>
-        </p:style>
-        <p:txBody>
-          <a:bodyPr rtlCol="0" anchor="ctr" lIns="0" rIns="0" tIns="0" bIns="0" wrap="square"/>
-          <a:lstStyle/>
-          <a:p>
-            <a:pPr algn="ctr"/>
-            <a:r>
-              <a:rPr sz="1300" b="1" i="0">
-                <a:solidFill>
-                  <a:srgbClr val="FFFFFF"/>
-                </a:solidFill>
-                <a:latin typeface="Arial"/>
-              </a:rPr>
-              <a:t>3</a:t>
+              <a:t>Distributed registries; the once-only principle; almost every service online.</a:t>
             </a:r>
           </a:p>
         </p:txBody>
@@ -13498,213 +12722,6 @@
       <p:sp>
         <p:nvSpPr>
           <p:cNvPr id="11" name="TextBox 10"/>
-          <p:cNvSpPr txBox="1"/>
-          <p:nvPr/>
-        </p:nvSpPr>
-        <p:spPr>
-          <a:xfrm>
-            <a:off x="1115568" y="3611879"/>
-            <a:ext cx="10527487" cy="1028699"/>
-          </a:xfrm>
-          <a:prstGeom prst="rect">
-            <a:avLst/>
-          </a:prstGeom>
-          <a:noFill/>
-        </p:spPr>
-        <p:txBody>
-          <a:bodyPr wrap="square">
-            <a:spAutoFit/>
-          </a:bodyPr>
-          <a:lstStyle/>
-          <a:p>
-            <a:pPr>
-              <a:spcAft>
-                <a:spcPts val="300"/>
-              </a:spcAft>
-            </a:pPr>
-            <a:r>
-              <a:rPr sz="1900" b="1" i="0">
-                <a:solidFill>
-                  <a:srgbClr val="1A1A1A"/>
-                </a:solidFill>
-                <a:latin typeface="Arial"/>
-              </a:rPr>
-              <a:t>Governance that is binding, not advisory</a:t>
-            </a:r>
-          </a:p>
-          <a:p>
-            <a:pPr>
-              <a:spcAft>
-                <a:spcPts val="300"/>
-              </a:spcAft>
-            </a:pPr>
-            <a:r>
-              <a:rPr sz="1550" b="0" i="0">
-                <a:solidFill>
-                  <a:srgbClr val="595959"/>
-                </a:solidFill>
-                <a:latin typeface="Arial"/>
-              </a:rPr>
-              <a:t>It can say no to a project that would fragment the architecture.</a:t>
-            </a:r>
-          </a:p>
-        </p:txBody>
-      </p:sp>
-      <p:sp>
-        <p:nvSpPr>
-          <p:cNvPr id="12" name="Rectangle 11"/>
-          <p:cNvSpPr/>
-          <p:nvPr/>
-        </p:nvSpPr>
-        <p:spPr>
-          <a:xfrm>
-            <a:off x="621792" y="4645152"/>
-            <a:ext cx="10881360" cy="12700"/>
-          </a:xfrm>
-          <a:prstGeom prst="rect">
-            <a:avLst/>
-          </a:prstGeom>
-          <a:solidFill>
-            <a:srgbClr val="DDECF4"/>
-          </a:solidFill>
-          <a:ln>
-            <a:noFill/>
-          </a:ln>
-          <a:effectLst/>
-        </p:spPr>
-        <p:style>
-          <a:lnRef idx="1">
-            <a:schemeClr val="accent1"/>
-          </a:lnRef>
-          <a:fillRef idx="3">
-            <a:schemeClr val="accent1"/>
-          </a:fillRef>
-          <a:effectRef idx="2">
-            <a:schemeClr val="accent1"/>
-          </a:effectRef>
-          <a:fontRef idx="minor">
-            <a:schemeClr val="lt1"/>
-          </a:fontRef>
-        </p:style>
-        <p:txBody>
-          <a:bodyPr rtlCol="0" anchor="ctr"/>
-          <a:lstStyle/>
-          <a:p>
-            <a:pPr algn="ctr"/>
-          </a:p>
-        </p:txBody>
-      </p:sp>
-      <p:sp>
-        <p:nvSpPr>
-          <p:cNvPr id="13" name="Oval 12"/>
-          <p:cNvSpPr/>
-          <p:nvPr/>
-        </p:nvSpPr>
-        <p:spPr>
-          <a:xfrm>
-            <a:off x="621792" y="4732020"/>
-            <a:ext cx="310896" cy="310896"/>
-          </a:xfrm>
-          <a:prstGeom prst="ellipse">
-            <a:avLst/>
-          </a:prstGeom>
-          <a:solidFill>
-            <a:srgbClr val="009CD6"/>
-          </a:solidFill>
-          <a:ln>
-            <a:noFill/>
-          </a:ln>
-          <a:effectLst/>
-        </p:spPr>
-        <p:style>
-          <a:lnRef idx="1">
-            <a:schemeClr val="accent1"/>
-          </a:lnRef>
-          <a:fillRef idx="3">
-            <a:schemeClr val="accent1"/>
-          </a:fillRef>
-          <a:effectRef idx="2">
-            <a:schemeClr val="accent1"/>
-          </a:effectRef>
-          <a:fontRef idx="minor">
-            <a:schemeClr val="lt1"/>
-          </a:fontRef>
-        </p:style>
-        <p:txBody>
-          <a:bodyPr rtlCol="0" anchor="ctr" lIns="0" rIns="0" tIns="0" bIns="0" wrap="square"/>
-          <a:lstStyle/>
-          <a:p>
-            <a:pPr algn="ctr"/>
-            <a:r>
-              <a:rPr sz="1300" b="1" i="0">
-                <a:solidFill>
-                  <a:srgbClr val="FFFFFF"/>
-                </a:solidFill>
-                <a:latin typeface="Arial"/>
-              </a:rPr>
-              <a:t>4</a:t>
-            </a:r>
-          </a:p>
-        </p:txBody>
-      </p:sp>
-      <p:sp>
-        <p:nvSpPr>
-          <p:cNvPr id="14" name="TextBox 13"/>
-          <p:cNvSpPr txBox="1"/>
-          <p:nvPr/>
-        </p:nvSpPr>
-        <p:spPr>
-          <a:xfrm>
-            <a:off x="1115568" y="4686300"/>
-            <a:ext cx="10527487" cy="1028699"/>
-          </a:xfrm>
-          <a:prstGeom prst="rect">
-            <a:avLst/>
-          </a:prstGeom>
-          <a:noFill/>
-        </p:spPr>
-        <p:txBody>
-          <a:bodyPr wrap="square">
-            <a:spAutoFit/>
-          </a:bodyPr>
-          <a:lstStyle/>
-          <a:p>
-            <a:pPr>
-              <a:spcAft>
-                <a:spcPts val="300"/>
-              </a:spcAft>
-            </a:pPr>
-            <a:r>
-              <a:rPr sz="1900" b="1" i="0">
-                <a:solidFill>
-                  <a:srgbClr val="1A1A1A"/>
-                </a:solidFill>
-                <a:latin typeface="Arial"/>
-              </a:rPr>
-              <a:t>Years to full maturity, with results visible in months</a:t>
-            </a:r>
-          </a:p>
-          <a:p>
-            <a:pPr>
-              <a:spcAft>
-                <a:spcPts val="300"/>
-              </a:spcAft>
-            </a:pPr>
-            <a:r>
-              <a:rPr sz="1550" b="0" i="0">
-                <a:solidFill>
-                  <a:srgbClr val="595959"/>
-                </a:solidFill>
-                <a:latin typeface="Arial"/>
-              </a:rPr>
-              <a:t>The horizon is long; the first intermediate wins are not.</a:t>
-            </a:r>
-          </a:p>
-        </p:txBody>
-      </p:sp>
-      <p:sp>
-        <p:nvSpPr>
-          <p:cNvPr id="15" name="TextBox 14"/>
           <p:cNvSpPr txBox="1"/>
           <p:nvPr/>
         </p:nvSpPr>
@@ -13731,14 +12748,14 @@
                 </a:solidFill>
                 <a:latin typeface="Arial"/>
               </a:rPr>
-              <a:t>Four contexts, one recurring pattern — recurrence is what makes it evidence, not luck.</a:t>
-            </a:r>
-          </a:p>
-        </p:txBody>
-      </p:sp>
-      <p:sp>
-        <p:nvSpPr>
-          <p:cNvPr id="16" name="TextBox 15"/>
+              <a:t>Four governments that could hardly differ more in size, resources and shape.</a:t>
+            </a:r>
+          </a:p>
+        </p:txBody>
+      </p:sp>
+      <p:sp>
+        <p:nvSpPr>
+          <p:cNvPr id="12" name="TextBox 11"/>
           <p:cNvSpPr txBox="1"/>
           <p:nvPr/>
         </p:nvSpPr>
@@ -13861,84 +12878,27 @@
                 </a:solidFill>
                 <a:latin typeface="Arial"/>
               </a:rPr>
-              <a:t>The failures are documented too — which is what makes it evidence</a:t>
-            </a:r>
-          </a:p>
-        </p:txBody>
-      </p:sp>
-      <p:sp>
-        <p:nvSpPr>
-          <p:cNvPr id="4" name="TextBox 3"/>
-          <p:cNvSpPr txBox="1"/>
+              <a:t>The same four elements show in every one</a:t>
+            </a:r>
+          </a:p>
+        </p:txBody>
+      </p:sp>
+      <p:sp>
+        <p:nvSpPr>
+          <p:cNvPr id="4" name="Oval 3"/>
+          <p:cNvSpPr/>
           <p:nvPr/>
         </p:nvSpPr>
         <p:spPr>
           <a:xfrm>
-            <a:off x="658368" y="1600200"/>
-            <a:ext cx="10881360" cy="2194560"/>
-          </a:xfrm>
-          <a:prstGeom prst="rect">
+            <a:off x="621792" y="1508760"/>
+            <a:ext cx="310896" cy="310896"/>
+          </a:xfrm>
+          <a:prstGeom prst="ellipse">
             <a:avLst/>
           </a:prstGeom>
-          <a:noFill/>
-        </p:spPr>
-        <p:txBody>
-          <a:bodyPr wrap="square">
-            <a:spAutoFit/>
-          </a:bodyPr>
-          <a:lstStyle/>
-          <a:p>
-            <a:pPr>
-              <a:spcAft>
-                <a:spcPts val="1200"/>
-              </a:spcAft>
-            </a:pPr>
-            <a:r>
-              <a:rPr sz="2000" b="0" i="0">
-                <a:solidFill>
-                  <a:srgbClr val="1A1A1A"/>
-                </a:solidFill>
-                <a:latin typeface="Arial"/>
-              </a:rPr>
-              <a:t>Kenya's identity programme met real obstacles — in the courts, in parliament, in implementation — and the debate is public and documented.</a:t>
-            </a:r>
-          </a:p>
-          <a:p>
-            <a:pPr>
-              <a:spcAft>
-                <a:spcPts val="1200"/>
-              </a:spcAft>
-            </a:pPr>
-            <a:r>
-              <a:rPr sz="2000" b="0" i="0">
-                <a:solidFill>
-                  <a:srgbClr val="1A1A1A"/>
-                </a:solidFill>
-                <a:latin typeface="Arial"/>
-              </a:rPr>
-              <a:t>That is not a reason to dismiss the approach; it is part of the evidence. The programmes that struggled struggled for consistent, learnable reasons.</a:t>
-            </a:r>
-          </a:p>
-        </p:txBody>
-      </p:sp>
-      <p:sp>
-        <p:nvSpPr>
-          <p:cNvPr id="5" name="Rounded Rectangle 4"/>
-          <p:cNvSpPr/>
-          <p:nvPr/>
-        </p:nvSpPr>
-        <p:spPr>
-          <a:xfrm>
-            <a:off x="658368" y="3977639"/>
-            <a:ext cx="10881360" cy="1325880"/>
-          </a:xfrm>
-          <a:prstGeom prst="roundRect">
-            <a:avLst>
-              <a:gd name="adj" fmla="val 4500"/>
-            </a:avLst>
-          </a:prstGeom>
           <a:solidFill>
-            <a:srgbClr val="E5F5FB"/>
+            <a:srgbClr val="009CD6"/>
           </a:solidFill>
           <a:ln>
             <a:noFill/>
@@ -13960,23 +12920,32 @@
           </a:fontRef>
         </p:style>
         <p:txBody>
-          <a:bodyPr rtlCol="0" anchor="ctr"/>
+          <a:bodyPr rtlCol="0" anchor="ctr" lIns="0" rIns="0" tIns="0" bIns="0" wrap="square"/>
           <a:lstStyle/>
           <a:p>
             <a:pPr algn="ctr"/>
-          </a:p>
-        </p:txBody>
-      </p:sp>
-      <p:sp>
-        <p:nvSpPr>
-          <p:cNvPr id="6" name="TextBox 5"/>
+            <a:r>
+              <a:rPr sz="1300" b="1" i="0">
+                <a:solidFill>
+                  <a:srgbClr val="FFFFFF"/>
+                </a:solidFill>
+                <a:latin typeface="Arial"/>
+              </a:rPr>
+              <a:t>1</a:t>
+            </a:r>
+          </a:p>
+        </p:txBody>
+      </p:sp>
+      <p:sp>
+        <p:nvSpPr>
+          <p:cNvPr id="5" name="TextBox 4"/>
           <p:cNvSpPr txBox="1"/>
           <p:nvPr/>
         </p:nvSpPr>
         <p:spPr>
           <a:xfrm>
-            <a:off x="859536" y="4169663"/>
-            <a:ext cx="10479024" cy="1051560"/>
+            <a:off x="1115568" y="1463040"/>
+            <a:ext cx="10527487" cy="1028699"/>
           </a:xfrm>
           <a:prstGeom prst="rect">
             <a:avLst/>
@@ -13991,24 +12960,530 @@
           <a:p>
             <a:pPr>
               <a:spcAft>
-                <a:spcPts val="700"/>
+                <a:spcPts val="300"/>
               </a:spcAft>
             </a:pPr>
             <a:r>
-              <a:rPr sz="2300" b="1" i="0">
+              <a:rPr sz="1900" b="1" i="0">
+                <a:solidFill>
+                  <a:srgbClr val="1A1A1A"/>
+                </a:solidFill>
+                <a:latin typeface="Arial"/>
+              </a:rPr>
+              <a:t>A small central team with real authority</a:t>
+            </a:r>
+          </a:p>
+          <a:p>
+            <a:pPr>
+              <a:spcAft>
+                <a:spcPts val="300"/>
+              </a:spcAft>
+            </a:pPr>
+            <a:r>
+              <a:rPr sz="1550" b="0" i="0">
+                <a:solidFill>
+                  <a:srgbClr val="595959"/>
+                </a:solidFill>
+                <a:latin typeface="Arial"/>
+              </a:rPr>
+              <a:t>Not a committee, and not a contractor.</a:t>
+            </a:r>
+          </a:p>
+        </p:txBody>
+      </p:sp>
+      <p:sp>
+        <p:nvSpPr>
+          <p:cNvPr id="6" name="Rectangle 5"/>
+          <p:cNvSpPr/>
+          <p:nvPr/>
+        </p:nvSpPr>
+        <p:spPr>
+          <a:xfrm>
+            <a:off x="621792" y="2496312"/>
+            <a:ext cx="10881360" cy="12700"/>
+          </a:xfrm>
+          <a:prstGeom prst="rect">
+            <a:avLst/>
+          </a:prstGeom>
+          <a:solidFill>
+            <a:srgbClr val="DDECF4"/>
+          </a:solidFill>
+          <a:ln>
+            <a:noFill/>
+          </a:ln>
+          <a:effectLst/>
+        </p:spPr>
+        <p:style>
+          <a:lnRef idx="1">
+            <a:schemeClr val="accent1"/>
+          </a:lnRef>
+          <a:fillRef idx="3">
+            <a:schemeClr val="accent1"/>
+          </a:fillRef>
+          <a:effectRef idx="2">
+            <a:schemeClr val="accent1"/>
+          </a:effectRef>
+          <a:fontRef idx="minor">
+            <a:schemeClr val="lt1"/>
+          </a:fontRef>
+        </p:style>
+        <p:txBody>
+          <a:bodyPr rtlCol="0" anchor="ctr"/>
+          <a:lstStyle/>
+          <a:p>
+            <a:pPr algn="ctr"/>
+          </a:p>
+        </p:txBody>
+      </p:sp>
+      <p:sp>
+        <p:nvSpPr>
+          <p:cNvPr id="7" name="Oval 6"/>
+          <p:cNvSpPr/>
+          <p:nvPr/>
+        </p:nvSpPr>
+        <p:spPr>
+          <a:xfrm>
+            <a:off x="621792" y="2583179"/>
+            <a:ext cx="310896" cy="310896"/>
+          </a:xfrm>
+          <a:prstGeom prst="ellipse">
+            <a:avLst/>
+          </a:prstGeom>
+          <a:solidFill>
+            <a:srgbClr val="009CD6"/>
+          </a:solidFill>
+          <a:ln>
+            <a:noFill/>
+          </a:ln>
+          <a:effectLst/>
+        </p:spPr>
+        <p:style>
+          <a:lnRef idx="1">
+            <a:schemeClr val="accent1"/>
+          </a:lnRef>
+          <a:fillRef idx="3">
+            <a:schemeClr val="accent1"/>
+          </a:fillRef>
+          <a:effectRef idx="2">
+            <a:schemeClr val="accent1"/>
+          </a:effectRef>
+          <a:fontRef idx="minor">
+            <a:schemeClr val="lt1"/>
+          </a:fontRef>
+        </p:style>
+        <p:txBody>
+          <a:bodyPr rtlCol="0" anchor="ctr" lIns="0" rIns="0" tIns="0" bIns="0" wrap="square"/>
+          <a:lstStyle/>
+          <a:p>
+            <a:pPr algn="ctr"/>
+            <a:r>
+              <a:rPr sz="1300" b="1" i="0">
+                <a:solidFill>
+                  <a:srgbClr val="FFFFFF"/>
+                </a:solidFill>
+                <a:latin typeface="Arial"/>
+              </a:rPr>
+              <a:t>2</a:t>
+            </a:r>
+          </a:p>
+        </p:txBody>
+      </p:sp>
+      <p:sp>
+        <p:nvSpPr>
+          <p:cNvPr id="8" name="TextBox 7"/>
+          <p:cNvSpPr txBox="1"/>
+          <p:nvPr/>
+        </p:nvSpPr>
+        <p:spPr>
+          <a:xfrm>
+            <a:off x="1115568" y="2537460"/>
+            <a:ext cx="10527487" cy="1028699"/>
+          </a:xfrm>
+          <a:prstGeom prst="rect">
+            <a:avLst/>
+          </a:prstGeom>
+          <a:noFill/>
+        </p:spPr>
+        <p:txBody>
+          <a:bodyPr wrap="square">
+            <a:spAutoFit/>
+          </a:bodyPr>
+          <a:lstStyle/>
+          <a:p>
+            <a:pPr>
+              <a:spcAft>
+                <a:spcPts val="300"/>
+              </a:spcAft>
+            </a:pPr>
+            <a:r>
+              <a:rPr sz="1900" b="1" i="0">
+                <a:solidFill>
+                  <a:srgbClr val="1A1A1A"/>
+                </a:solidFill>
+                <a:latin typeface="Arial"/>
+              </a:rPr>
+              <a:t>A published framework other agencies adopt</a:t>
+            </a:r>
+          </a:p>
+          <a:p>
+            <a:pPr>
+              <a:spcAft>
+                <a:spcPts val="300"/>
+              </a:spcAft>
+            </a:pPr>
+            <a:r>
+              <a:rPr sz="1550" b="0" i="0">
+                <a:solidFill>
+                  <a:srgbClr val="595959"/>
+                </a:solidFill>
+                <a:latin typeface="Arial"/>
+              </a:rPr>
+              <a:t>Adopted because it helps them, not because it is forced on them.</a:t>
+            </a:r>
+          </a:p>
+        </p:txBody>
+      </p:sp>
+      <p:sp>
+        <p:nvSpPr>
+          <p:cNvPr id="9" name="Rectangle 8"/>
+          <p:cNvSpPr/>
+          <p:nvPr/>
+        </p:nvSpPr>
+        <p:spPr>
+          <a:xfrm>
+            <a:off x="621792" y="3570732"/>
+            <a:ext cx="10881360" cy="12700"/>
+          </a:xfrm>
+          <a:prstGeom prst="rect">
+            <a:avLst/>
+          </a:prstGeom>
+          <a:solidFill>
+            <a:srgbClr val="DDECF4"/>
+          </a:solidFill>
+          <a:ln>
+            <a:noFill/>
+          </a:ln>
+          <a:effectLst/>
+        </p:spPr>
+        <p:style>
+          <a:lnRef idx="1">
+            <a:schemeClr val="accent1"/>
+          </a:lnRef>
+          <a:fillRef idx="3">
+            <a:schemeClr val="accent1"/>
+          </a:fillRef>
+          <a:effectRef idx="2">
+            <a:schemeClr val="accent1"/>
+          </a:effectRef>
+          <a:fontRef idx="minor">
+            <a:schemeClr val="lt1"/>
+          </a:fontRef>
+        </p:style>
+        <p:txBody>
+          <a:bodyPr rtlCol="0" anchor="ctr"/>
+          <a:lstStyle/>
+          <a:p>
+            <a:pPr algn="ctr"/>
+          </a:p>
+        </p:txBody>
+      </p:sp>
+      <p:sp>
+        <p:nvSpPr>
+          <p:cNvPr id="10" name="Oval 9"/>
+          <p:cNvSpPr/>
+          <p:nvPr/>
+        </p:nvSpPr>
+        <p:spPr>
+          <a:xfrm>
+            <a:off x="621792" y="3657599"/>
+            <a:ext cx="310896" cy="310896"/>
+          </a:xfrm>
+          <a:prstGeom prst="ellipse">
+            <a:avLst/>
+          </a:prstGeom>
+          <a:solidFill>
+            <a:srgbClr val="009CD6"/>
+          </a:solidFill>
+          <a:ln>
+            <a:noFill/>
+          </a:ln>
+          <a:effectLst/>
+        </p:spPr>
+        <p:style>
+          <a:lnRef idx="1">
+            <a:schemeClr val="accent1"/>
+          </a:lnRef>
+          <a:fillRef idx="3">
+            <a:schemeClr val="accent1"/>
+          </a:fillRef>
+          <a:effectRef idx="2">
+            <a:schemeClr val="accent1"/>
+          </a:effectRef>
+          <a:fontRef idx="minor">
+            <a:schemeClr val="lt1"/>
+          </a:fontRef>
+        </p:style>
+        <p:txBody>
+          <a:bodyPr rtlCol="0" anchor="ctr" lIns="0" rIns="0" tIns="0" bIns="0" wrap="square"/>
+          <a:lstStyle/>
+          <a:p>
+            <a:pPr algn="ctr"/>
+            <a:r>
+              <a:rPr sz="1300" b="1" i="0">
+                <a:solidFill>
+                  <a:srgbClr val="FFFFFF"/>
+                </a:solidFill>
+                <a:latin typeface="Arial"/>
+              </a:rPr>
+              <a:t>3</a:t>
+            </a:r>
+          </a:p>
+        </p:txBody>
+      </p:sp>
+      <p:sp>
+        <p:nvSpPr>
+          <p:cNvPr id="11" name="TextBox 10"/>
+          <p:cNvSpPr txBox="1"/>
+          <p:nvPr/>
+        </p:nvSpPr>
+        <p:spPr>
+          <a:xfrm>
+            <a:off x="1115568" y="3611879"/>
+            <a:ext cx="10527487" cy="1028699"/>
+          </a:xfrm>
+          <a:prstGeom prst="rect">
+            <a:avLst/>
+          </a:prstGeom>
+          <a:noFill/>
+        </p:spPr>
+        <p:txBody>
+          <a:bodyPr wrap="square">
+            <a:spAutoFit/>
+          </a:bodyPr>
+          <a:lstStyle/>
+          <a:p>
+            <a:pPr>
+              <a:spcAft>
+                <a:spcPts val="300"/>
+              </a:spcAft>
+            </a:pPr>
+            <a:r>
+              <a:rPr sz="1900" b="1" i="0">
+                <a:solidFill>
+                  <a:srgbClr val="1A1A1A"/>
+                </a:solidFill>
+                <a:latin typeface="Arial"/>
+              </a:rPr>
+              <a:t>Governance that is binding, not advisory</a:t>
+            </a:r>
+          </a:p>
+          <a:p>
+            <a:pPr>
+              <a:spcAft>
+                <a:spcPts val="300"/>
+              </a:spcAft>
+            </a:pPr>
+            <a:r>
+              <a:rPr sz="1550" b="0" i="0">
+                <a:solidFill>
+                  <a:srgbClr val="595959"/>
+                </a:solidFill>
+                <a:latin typeface="Arial"/>
+              </a:rPr>
+              <a:t>It can say no to a project that would fragment the architecture.</a:t>
+            </a:r>
+          </a:p>
+        </p:txBody>
+      </p:sp>
+      <p:sp>
+        <p:nvSpPr>
+          <p:cNvPr id="12" name="Rectangle 11"/>
+          <p:cNvSpPr/>
+          <p:nvPr/>
+        </p:nvSpPr>
+        <p:spPr>
+          <a:xfrm>
+            <a:off x="621792" y="4645152"/>
+            <a:ext cx="10881360" cy="12700"/>
+          </a:xfrm>
+          <a:prstGeom prst="rect">
+            <a:avLst/>
+          </a:prstGeom>
+          <a:solidFill>
+            <a:srgbClr val="DDECF4"/>
+          </a:solidFill>
+          <a:ln>
+            <a:noFill/>
+          </a:ln>
+          <a:effectLst/>
+        </p:spPr>
+        <p:style>
+          <a:lnRef idx="1">
+            <a:schemeClr val="accent1"/>
+          </a:lnRef>
+          <a:fillRef idx="3">
+            <a:schemeClr val="accent1"/>
+          </a:fillRef>
+          <a:effectRef idx="2">
+            <a:schemeClr val="accent1"/>
+          </a:effectRef>
+          <a:fontRef idx="minor">
+            <a:schemeClr val="lt1"/>
+          </a:fontRef>
+        </p:style>
+        <p:txBody>
+          <a:bodyPr rtlCol="0" anchor="ctr"/>
+          <a:lstStyle/>
+          <a:p>
+            <a:pPr algn="ctr"/>
+          </a:p>
+        </p:txBody>
+      </p:sp>
+      <p:sp>
+        <p:nvSpPr>
+          <p:cNvPr id="13" name="Oval 12"/>
+          <p:cNvSpPr/>
+          <p:nvPr/>
+        </p:nvSpPr>
+        <p:spPr>
+          <a:xfrm>
+            <a:off x="621792" y="4732020"/>
+            <a:ext cx="310896" cy="310896"/>
+          </a:xfrm>
+          <a:prstGeom prst="ellipse">
+            <a:avLst/>
+          </a:prstGeom>
+          <a:solidFill>
+            <a:srgbClr val="009CD6"/>
+          </a:solidFill>
+          <a:ln>
+            <a:noFill/>
+          </a:ln>
+          <a:effectLst/>
+        </p:spPr>
+        <p:style>
+          <a:lnRef idx="1">
+            <a:schemeClr val="accent1"/>
+          </a:lnRef>
+          <a:fillRef idx="3">
+            <a:schemeClr val="accent1"/>
+          </a:fillRef>
+          <a:effectRef idx="2">
+            <a:schemeClr val="accent1"/>
+          </a:effectRef>
+          <a:fontRef idx="minor">
+            <a:schemeClr val="lt1"/>
+          </a:fontRef>
+        </p:style>
+        <p:txBody>
+          <a:bodyPr rtlCol="0" anchor="ctr" lIns="0" rIns="0" tIns="0" bIns="0" wrap="square"/>
+          <a:lstStyle/>
+          <a:p>
+            <a:pPr algn="ctr"/>
+            <a:r>
+              <a:rPr sz="1300" b="1" i="0">
+                <a:solidFill>
+                  <a:srgbClr val="FFFFFF"/>
+                </a:solidFill>
+                <a:latin typeface="Arial"/>
+              </a:rPr>
+              <a:t>4</a:t>
+            </a:r>
+          </a:p>
+        </p:txBody>
+      </p:sp>
+      <p:sp>
+        <p:nvSpPr>
+          <p:cNvPr id="14" name="TextBox 13"/>
+          <p:cNvSpPr txBox="1"/>
+          <p:nvPr/>
+        </p:nvSpPr>
+        <p:spPr>
+          <a:xfrm>
+            <a:off x="1115568" y="4686300"/>
+            <a:ext cx="10527487" cy="1028699"/>
+          </a:xfrm>
+          <a:prstGeom prst="rect">
+            <a:avLst/>
+          </a:prstGeom>
+          <a:noFill/>
+        </p:spPr>
+        <p:txBody>
+          <a:bodyPr wrap="square">
+            <a:spAutoFit/>
+          </a:bodyPr>
+          <a:lstStyle/>
+          <a:p>
+            <a:pPr>
+              <a:spcAft>
+                <a:spcPts val="300"/>
+              </a:spcAft>
+            </a:pPr>
+            <a:r>
+              <a:rPr sz="1900" b="1" i="0">
+                <a:solidFill>
+                  <a:srgbClr val="1A1A1A"/>
+                </a:solidFill>
+                <a:latin typeface="Arial"/>
+              </a:rPr>
+              <a:t>Years to full maturity, with results visible in months</a:t>
+            </a:r>
+          </a:p>
+          <a:p>
+            <a:pPr>
+              <a:spcAft>
+                <a:spcPts val="300"/>
+              </a:spcAft>
+            </a:pPr>
+            <a:r>
+              <a:rPr sz="1550" b="0" i="0">
+                <a:solidFill>
+                  <a:srgbClr val="595959"/>
+                </a:solidFill>
+                <a:latin typeface="Arial"/>
+              </a:rPr>
+              <a:t>The horizon is long; the first intermediate wins are not.</a:t>
+            </a:r>
+          </a:p>
+        </p:txBody>
+      </p:sp>
+      <p:sp>
+        <p:nvSpPr>
+          <p:cNvPr id="15" name="TextBox 14"/>
+          <p:cNvSpPr txBox="1"/>
+          <p:nvPr/>
+        </p:nvSpPr>
+        <p:spPr>
+          <a:xfrm>
+            <a:off x="658368" y="5870448"/>
+            <a:ext cx="10881360" cy="548640"/>
+          </a:xfrm>
+          <a:prstGeom prst="rect">
+            <a:avLst/>
+          </a:prstGeom>
+          <a:noFill/>
+        </p:spPr>
+        <p:txBody>
+          <a:bodyPr wrap="square">
+            <a:spAutoFit/>
+          </a:bodyPr>
+          <a:lstStyle/>
+          <a:p>
+            <a:r>
+              <a:rPr sz="1550" b="1" i="0">
                 <a:solidFill>
                   <a:srgbClr val="006E96"/>
                 </a:solidFill>
                 <a:latin typeface="Arial"/>
               </a:rPr>
-              <a:t>Not a brochure of successes. A record of what works and what does not.</a:t>
-            </a:r>
-          </a:p>
-        </p:txBody>
-      </p:sp>
-      <p:sp>
-        <p:nvSpPr>
-          <p:cNvPr id="7" name="TextBox 6"/>
+              <a:t>Four contexts, one recurring pattern — recurrence is what makes it evidence, not luck.</a:t>
+            </a:r>
+          </a:p>
+        </p:txBody>
+      </p:sp>
+      <p:sp>
+        <p:nvSpPr>
+          <p:cNvPr id="16" name="TextBox 15"/>
           <p:cNvSpPr txBox="1"/>
           <p:nvPr/>
         </p:nvSpPr>
@@ -14131,7 +13606,7 @@
                 </a:solidFill>
                 <a:latin typeface="Arial"/>
               </a:rPr>
-              <a:t>You are not the first — the path is already charted</a:t>
+              <a:t>The failures are documented too — which is what makes it evidence</a:t>
             </a:r>
           </a:p>
         </p:txBody>
@@ -14170,7 +13645,7 @@
                 </a:solidFill>
                 <a:latin typeface="Arial"/>
               </a:rPr>
-              <a:t>The common elements are known, and so are the common ways programmes fail. You are not being asked to invent an approach and hope it works.</a:t>
+              <a:t>Kenya's identity programme met real obstacles — in the courts, in parliament, in implementation — and the debate is public and documented.</a:t>
             </a:r>
           </a:p>
           <a:p>
@@ -14186,7 +13661,7 @@
                 </a:solidFill>
                 <a:latin typeface="Arial"/>
               </a:rPr>
-              <a:t>You are being asked to adapt a pattern four very different governments have already shown delivers — to your country, your constraints, your sector.</a:t>
+              <a:t>That is not a reason to dismiss the approach; it is part of the evidence. The programmes that struggled struggled for consistent, learnable reasons.</a:t>
             </a:r>
           </a:p>
         </p:txBody>
@@ -14271,7 +13746,7 @@
                 </a:solidFill>
                 <a:latin typeface="Arial"/>
               </a:rPr>
-              <a:t>A far easier case to make than "trust me, this should work".</a:t>
+              <a:t>Not a brochure of successes. A record of what works and what does not.</a:t>
             </a:r>
           </a:p>
         </p:txBody>
@@ -14330,95 +13805,23 @@
       <p:grpSpPr/>
       <p:sp>
         <p:nvSpPr>
-          <p:cNvPr id="2" name="TextBox 1"/>
-          <p:cNvSpPr txBox="1"/>
+          <p:cNvPr id="2" name="Rectangle 1"/>
+          <p:cNvSpPr/>
           <p:nvPr/>
         </p:nvSpPr>
         <p:spPr>
           <a:xfrm>
-            <a:off x="1005840" y="2103120"/>
-            <a:ext cx="10149840" cy="2377440"/>
+            <a:off x="457200" y="384048"/>
+            <a:ext cx="45720" cy="256032"/>
           </a:xfrm>
           <a:prstGeom prst="rect">
             <a:avLst/>
           </a:prstGeom>
-          <a:noFill/>
-        </p:spPr>
-        <p:txBody>
-          <a:bodyPr wrap="square">
-            <a:spAutoFit/>
-          </a:bodyPr>
-          <a:lstStyle/>
-          <a:p>
-            <a:r>
-              <a:rPr sz="3000" b="1" i="0">
-                <a:solidFill>
-                  <a:srgbClr val="1A1A1A"/>
-                </a:solidFill>
-                <a:latin typeface="Arial"/>
-              </a:rPr>
-              <a:t>Across four very different governments the same architectural pattern has already produced results — so your question is not whether it works, but how to apply it where you are.</a:t>
-            </a:r>
-          </a:p>
-        </p:txBody>
-      </p:sp>
-      <p:sp>
-        <p:nvSpPr>
-          <p:cNvPr id="3" name="TextBox 2"/>
-          <p:cNvSpPr txBox="1"/>
-          <p:nvPr/>
-        </p:nvSpPr>
-        <p:spPr>
-          <a:xfrm>
-            <a:off x="1005840" y="1554480"/>
-            <a:ext cx="5486400" cy="365760"/>
-          </a:xfrm>
-          <a:prstGeom prst="rect">
-            <a:avLst/>
-          </a:prstGeom>
-          <a:noFill/>
-        </p:spPr>
-        <p:txBody>
-          <a:bodyPr wrap="square">
-            <a:spAutoFit/>
-          </a:bodyPr>
-          <a:lstStyle/>
-          <a:p>
-            <a:r>
-              <a:rPr sz="1200" b="1" i="0">
-                <a:solidFill>
-                  <a:srgbClr val="006E96"/>
-                </a:solidFill>
-                <a:latin typeface="Arial"/>
-              </a:rPr>
-              <a:t>IN ONE SENTENCE</a:t>
-            </a:r>
-          </a:p>
-        </p:txBody>
-      </p:sp>
-      <p:sp>
-        <p:nvSpPr>
-          <p:cNvPr id="4" name="Rounded Rectangle 3"/>
-          <p:cNvSpPr/>
-          <p:nvPr/>
-        </p:nvSpPr>
-        <p:spPr>
-          <a:xfrm>
-            <a:off x="658368" y="4709160"/>
-            <a:ext cx="10881360" cy="1554480"/>
-          </a:xfrm>
-          <a:prstGeom prst="roundRect">
-            <a:avLst>
-              <a:gd name="adj" fmla="val 4500"/>
-            </a:avLst>
-          </a:prstGeom>
           <a:solidFill>
-            <a:srgbClr val="FFFFFF"/>
+            <a:srgbClr val="009CD6"/>
           </a:solidFill>
-          <a:ln w="9525">
-            <a:solidFill>
-              <a:srgbClr val="009CD6"/>
-            </a:solidFill>
+          <a:ln>
+            <a:noFill/>
           </a:ln>
           <a:effectLst/>
         </p:spPr>
@@ -14437,56 +13840,190 @@
           </a:fontRef>
         </p:style>
         <p:txBody>
-          <a:bodyPr rtlCol="0" anchor="ctr" wrap="square" lIns="228600" rIns="228600" tIns="109728" bIns="109728">
-            <a:noAutofit/>
+          <a:bodyPr rtlCol="0" anchor="ctr"/>
+          <a:lstStyle/>
+          <a:p>
+            <a:pPr algn="ctr"/>
+          </a:p>
+        </p:txBody>
+      </p:sp>
+      <p:sp>
+        <p:nvSpPr>
+          <p:cNvPr id="3" name="TextBox 2"/>
+          <p:cNvSpPr txBox="1"/>
+          <p:nvPr/>
+        </p:nvSpPr>
+        <p:spPr>
+          <a:xfrm>
+            <a:off x="621792" y="274320"/>
+            <a:ext cx="11247120" cy="914400"/>
+          </a:xfrm>
+          <a:prstGeom prst="rect">
+            <a:avLst/>
+          </a:prstGeom>
+          <a:noFill/>
+        </p:spPr>
+        <p:txBody>
+          <a:bodyPr wrap="square">
+            <a:spAutoFit/>
           </a:bodyPr>
           <a:lstStyle/>
           <a:p>
-            <a:pPr algn="l">
+            <a:r>
+              <a:rPr sz="2800" b="1" i="0">
+                <a:solidFill>
+                  <a:srgbClr val="1A1A1A"/>
+                </a:solidFill>
+                <a:latin typeface="Arial"/>
+              </a:rPr>
+              <a:t>You are not the first — the path is already charted</a:t>
+            </a:r>
+          </a:p>
+        </p:txBody>
+      </p:sp>
+      <p:sp>
+        <p:nvSpPr>
+          <p:cNvPr id="4" name="TextBox 3"/>
+          <p:cNvSpPr txBox="1"/>
+          <p:nvPr/>
+        </p:nvSpPr>
+        <p:spPr>
+          <a:xfrm>
+            <a:off x="658368" y="1600200"/>
+            <a:ext cx="10881360" cy="2194560"/>
+          </a:xfrm>
+          <a:prstGeom prst="rect">
+            <a:avLst/>
+          </a:prstGeom>
+          <a:noFill/>
+        </p:spPr>
+        <p:txBody>
+          <a:bodyPr wrap="square">
+            <a:spAutoFit/>
+          </a:bodyPr>
+          <a:lstStyle/>
+          <a:p>
+            <a:pPr>
               <a:spcAft>
-                <a:spcPts val="400"/>
+                <a:spcPts val="1200"/>
               </a:spcAft>
             </a:pPr>
             <a:r>
-              <a:rPr sz="1800" b="1" i="0">
+              <a:rPr sz="2000" b="0" i="0">
+                <a:solidFill>
+                  <a:srgbClr val="1A1A1A"/>
+                </a:solidFill>
+                <a:latin typeface="Arial"/>
+              </a:rPr>
+              <a:t>The common elements are known, and so are the common ways programmes fail. You are not being asked to invent an approach and hope it works.</a:t>
+            </a:r>
+          </a:p>
+          <a:p>
+            <a:pPr>
+              <a:spcAft>
+                <a:spcPts val="1200"/>
+              </a:spcAft>
+            </a:pPr>
+            <a:r>
+              <a:rPr sz="2000" b="0" i="0">
+                <a:solidFill>
+                  <a:srgbClr val="1A1A1A"/>
+                </a:solidFill>
+                <a:latin typeface="Arial"/>
+              </a:rPr>
+              <a:t>You are being asked to adapt a pattern four very different governments have already shown delivers — to your country, your constraints, your sector.</a:t>
+            </a:r>
+          </a:p>
+        </p:txBody>
+      </p:sp>
+      <p:sp>
+        <p:nvSpPr>
+          <p:cNvPr id="5" name="Rounded Rectangle 4"/>
+          <p:cNvSpPr/>
+          <p:nvPr/>
+        </p:nvSpPr>
+        <p:spPr>
+          <a:xfrm>
+            <a:off x="658368" y="3977639"/>
+            <a:ext cx="10881360" cy="1325880"/>
+          </a:xfrm>
+          <a:prstGeom prst="roundRect">
+            <a:avLst>
+              <a:gd name="adj" fmla="val 4500"/>
+            </a:avLst>
+          </a:prstGeom>
+          <a:solidFill>
+            <a:srgbClr val="E5F5FB"/>
+          </a:solidFill>
+          <a:ln>
+            <a:noFill/>
+          </a:ln>
+          <a:effectLst/>
+        </p:spPr>
+        <p:style>
+          <a:lnRef idx="1">
+            <a:schemeClr val="accent1"/>
+          </a:lnRef>
+          <a:fillRef idx="3">
+            <a:schemeClr val="accent1"/>
+          </a:fillRef>
+          <a:effectRef idx="2">
+            <a:schemeClr val="accent1"/>
+          </a:effectRef>
+          <a:fontRef idx="minor">
+            <a:schemeClr val="lt1"/>
+          </a:fontRef>
+        </p:style>
+        <p:txBody>
+          <a:bodyPr rtlCol="0" anchor="ctr"/>
+          <a:lstStyle/>
+          <a:p>
+            <a:pPr algn="ctr"/>
+          </a:p>
+        </p:txBody>
+      </p:sp>
+      <p:sp>
+        <p:nvSpPr>
+          <p:cNvPr id="6" name="TextBox 5"/>
+          <p:cNvSpPr txBox="1"/>
+          <p:nvPr/>
+        </p:nvSpPr>
+        <p:spPr>
+          <a:xfrm>
+            <a:off x="859536" y="4169663"/>
+            <a:ext cx="10479024" cy="1051560"/>
+          </a:xfrm>
+          <a:prstGeom prst="rect">
+            <a:avLst/>
+          </a:prstGeom>
+          <a:noFill/>
+        </p:spPr>
+        <p:txBody>
+          <a:bodyPr wrap="square">
+            <a:spAutoFit/>
+          </a:bodyPr>
+          <a:lstStyle/>
+          <a:p>
+            <a:pPr>
+              <a:spcAft>
+                <a:spcPts val="700"/>
+              </a:spcAft>
+            </a:pPr>
+            <a:r>
+              <a:rPr sz="2300" b="1" i="0">
                 <a:solidFill>
                   <a:srgbClr val="006E96"/>
                 </a:solidFill>
                 <a:latin typeface="Arial"/>
               </a:rPr>
-              <a:t>Do this on your own sector. </a:t>
-            </a:r>
-            <a:r>
-              <a:rPr sz="1800" b="1" i="0">
-                <a:solidFill>
-                  <a:srgbClr val="1A1A1A"/>
-                </a:solidFill>
-                <a:latin typeface="Arial"/>
-              </a:rPr>
-              <a:t>Generate comparator-country evidence tuned to your context.</a:t>
-            </a:r>
-          </a:p>
-          <a:p>
-            <a:pPr algn="l">
-              <a:spcAft>
-                <a:spcPts val="400"/>
-              </a:spcAft>
-            </a:pPr>
-            <a:r>
-              <a:rPr sz="1800" b="0" i="0">
-                <a:solidFill>
-                  <a:srgbClr val="595959"/>
-                </a:solidFill>
-                <a:latin typeface="Arial"/>
-              </a:rPr>
-              <a:t>The prompt in the companion material gives you comparator cards with cited sources. Before the next video.</a:t>
-            </a:r>
-          </a:p>
-        </p:txBody>
-      </p:sp>
-      <p:sp>
-        <p:nvSpPr>
-          <p:cNvPr id="5" name="TextBox 4"/>
+              <a:t>A far easier case to make than "trust me, this should work".</a:t>
+            </a:r>
+          </a:p>
+        </p:txBody>
+      </p:sp>
+      <p:sp>
+        <p:nvSpPr>
+          <p:cNvPr id="7" name="TextBox 6"/>
           <p:cNvSpPr txBox="1"/>
           <p:nvPr/>
         </p:nvSpPr>
@@ -14514,41 +14051,6 @@
                 <a:latin typeface="Arial"/>
               </a:rPr>
               <a:t>5.1 · Is this proven, or just theory? — evidence from real programmes</a:t>
-            </a:r>
-          </a:p>
-        </p:txBody>
-      </p:sp>
-      <p:sp>
-        <p:nvSpPr>
-          <p:cNvPr id="6" name="TextBox 5"/>
-          <p:cNvSpPr txBox="1"/>
-          <p:nvPr/>
-        </p:nvSpPr>
-        <p:spPr>
-          <a:xfrm>
-            <a:off x="10058400" y="6473952"/>
-            <a:ext cx="1673352" cy="292608"/>
-          </a:xfrm>
-          <a:prstGeom prst="rect">
-            <a:avLst/>
-          </a:prstGeom>
-          <a:noFill/>
-        </p:spPr>
-        <p:txBody>
-          <a:bodyPr wrap="square">
-            <a:spAutoFit/>
-          </a:bodyPr>
-          <a:lstStyle/>
-          <a:p>
-            <a:pPr algn="r"/>
-            <a:r>
-              <a:rPr sz="900" b="0" i="0">
-                <a:solidFill>
-                  <a:srgbClr val="595959"/>
-                </a:solidFill>
-                <a:latin typeface="Arial"/>
-              </a:rPr>
-              <a:t>www.itu.int</a:t>
             </a:r>
           </a:p>
         </p:txBody>
@@ -14573,23 +14075,95 @@
       <p:grpSpPr/>
       <p:sp>
         <p:nvSpPr>
-          <p:cNvPr id="2" name="Rectangle 1"/>
-          <p:cNvSpPr/>
+          <p:cNvPr id="2" name="TextBox 1"/>
+          <p:cNvSpPr txBox="1"/>
           <p:nvPr/>
         </p:nvSpPr>
         <p:spPr>
           <a:xfrm>
-            <a:off x="457200" y="384048"/>
-            <a:ext cx="45720" cy="256032"/>
+            <a:off x="1005840" y="2103120"/>
+            <a:ext cx="10149840" cy="2377440"/>
           </a:xfrm>
           <a:prstGeom prst="rect">
             <a:avLst/>
           </a:prstGeom>
+          <a:noFill/>
+        </p:spPr>
+        <p:txBody>
+          <a:bodyPr wrap="square">
+            <a:spAutoFit/>
+          </a:bodyPr>
+          <a:lstStyle/>
+          <a:p>
+            <a:r>
+              <a:rPr sz="3000" b="1" i="0">
+                <a:solidFill>
+                  <a:srgbClr val="1A1A1A"/>
+                </a:solidFill>
+                <a:latin typeface="Arial"/>
+              </a:rPr>
+              <a:t>Across four very different governments the same architectural pattern has already produced results — so your question is not whether it works, but how to apply it where you are.</a:t>
+            </a:r>
+          </a:p>
+        </p:txBody>
+      </p:sp>
+      <p:sp>
+        <p:nvSpPr>
+          <p:cNvPr id="3" name="TextBox 2"/>
+          <p:cNvSpPr txBox="1"/>
+          <p:nvPr/>
+        </p:nvSpPr>
+        <p:spPr>
+          <a:xfrm>
+            <a:off x="1005840" y="1554480"/>
+            <a:ext cx="5486400" cy="365760"/>
+          </a:xfrm>
+          <a:prstGeom prst="rect">
+            <a:avLst/>
+          </a:prstGeom>
+          <a:noFill/>
+        </p:spPr>
+        <p:txBody>
+          <a:bodyPr wrap="square">
+            <a:spAutoFit/>
+          </a:bodyPr>
+          <a:lstStyle/>
+          <a:p>
+            <a:r>
+              <a:rPr sz="1200" b="1" i="0">
+                <a:solidFill>
+                  <a:srgbClr val="006E96"/>
+                </a:solidFill>
+                <a:latin typeface="Arial"/>
+              </a:rPr>
+              <a:t>IN ONE SENTENCE</a:t>
+            </a:r>
+          </a:p>
+        </p:txBody>
+      </p:sp>
+      <p:sp>
+        <p:nvSpPr>
+          <p:cNvPr id="4" name="Rounded Rectangle 3"/>
+          <p:cNvSpPr/>
+          <p:nvPr/>
+        </p:nvSpPr>
+        <p:spPr>
+          <a:xfrm>
+            <a:off x="658368" y="4709160"/>
+            <a:ext cx="10881360" cy="1554480"/>
+          </a:xfrm>
+          <a:prstGeom prst="roundRect">
+            <a:avLst>
+              <a:gd name="adj" fmla="val 4500"/>
+            </a:avLst>
+          </a:prstGeom>
           <a:solidFill>
-            <a:srgbClr val="009CD6"/>
+            <a:srgbClr val="FFFFFF"/>
           </a:solidFill>
-          <a:ln>
-            <a:noFill/>
+          <a:ln w="9525">
+            <a:solidFill>
+              <a:srgbClr val="009CD6"/>
+            </a:solidFill>
           </a:ln>
           <a:effectLst/>
         </p:spPr>
@@ -14608,146 +14182,49 @@
           </a:fontRef>
         </p:style>
         <p:txBody>
-          <a:bodyPr rtlCol="0" anchor="ctr"/>
-          <a:lstStyle/>
-          <a:p>
-            <a:pPr algn="ctr"/>
-          </a:p>
-        </p:txBody>
-      </p:sp>
-      <p:sp>
-        <p:nvSpPr>
-          <p:cNvPr id="3" name="TextBox 2"/>
-          <p:cNvSpPr txBox="1"/>
-          <p:nvPr/>
-        </p:nvSpPr>
-        <p:spPr>
-          <a:xfrm>
-            <a:off x="621792" y="274320"/>
-            <a:ext cx="11247120" cy="914400"/>
-          </a:xfrm>
-          <a:prstGeom prst="rect">
-            <a:avLst/>
-          </a:prstGeom>
-          <a:noFill/>
-        </p:spPr>
-        <p:txBody>
-          <a:bodyPr wrap="square">
-            <a:spAutoFit/>
+          <a:bodyPr rtlCol="0" anchor="ctr" wrap="square" lIns="228600" rIns="228600" tIns="109728" bIns="109728">
+            <a:noAutofit/>
           </a:bodyPr>
           <a:lstStyle/>
           <a:p>
-            <a:r>
-              <a:rPr sz="2800" b="1" i="0">
+            <a:pPr algn="l">
+              <a:spcAft>
+                <a:spcPts val="400"/>
+              </a:spcAft>
+            </a:pPr>
+            <a:r>
+              <a:rPr sz="1800" b="1" i="0">
+                <a:solidFill>
+                  <a:srgbClr val="006E96"/>
+                </a:solidFill>
+                <a:latin typeface="Arial"/>
+              </a:rPr>
+              <a:t>Do this on your own sector. </a:t>
+            </a:r>
+            <a:r>
+              <a:rPr sz="1800" b="1" i="0">
                 <a:solidFill>
                   <a:srgbClr val="1A1A1A"/>
                 </a:solidFill>
                 <a:latin typeface="Arial"/>
               </a:rPr>
-              <a:t>Sources</a:t>
-            </a:r>
-          </a:p>
-        </p:txBody>
-      </p:sp>
-      <p:sp>
-        <p:nvSpPr>
-          <p:cNvPr id="4" name="TextBox 3"/>
-          <p:cNvSpPr txBox="1"/>
-          <p:nvPr/>
-        </p:nvSpPr>
-        <p:spPr>
-          <a:xfrm>
-            <a:off x="658368" y="1554480"/>
-            <a:ext cx="10789920" cy="3840480"/>
-          </a:xfrm>
-          <a:prstGeom prst="rect">
-            <a:avLst/>
-          </a:prstGeom>
-          <a:noFill/>
-        </p:spPr>
-        <p:txBody>
-          <a:bodyPr wrap="square">
-            <a:spAutoFit/>
-          </a:bodyPr>
-          <a:lstStyle/>
-          <a:p>
-            <a:pPr>
+              <a:t>Generate comparator-country evidence tuned to your context.</a:t>
+            </a:r>
+          </a:p>
+          <a:p>
+            <a:pPr algn="l">
               <a:spcAft>
-                <a:spcPts val="1200"/>
+                <a:spcPts val="400"/>
               </a:spcAft>
             </a:pPr>
             <a:r>
-              <a:rPr sz="1700" b="0" i="0">
+              <a:rPr sz="1800" b="0" i="0">
                 <a:solidFill>
-                  <a:srgbClr val="1A1A1A"/>
+                  <a:srgbClr val="595959"/>
                 </a:solidFill>
                 <a:latin typeface="Arial"/>
               </a:rPr>
-              <a:t>•  Rwanda — Irembo (irembo.gov.rw)</a:t>
-            </a:r>
-          </a:p>
-          <a:p>
-            <a:pPr>
-              <a:spcAft>
-                <a:spcPts val="1200"/>
-              </a:spcAft>
-            </a:pPr>
-            <a:r>
-              <a:rPr sz="1700" b="0" i="0">
-                <a:solidFill>
-                  <a:srgbClr val="1A1A1A"/>
-                </a:solidFill>
-                <a:latin typeface="Arial"/>
-              </a:rPr>
-              <a:t>•  Kenya — Huduma Kenya (huduma.go.ke)</a:t>
-            </a:r>
-          </a:p>
-          <a:p>
-            <a:pPr>
-              <a:spcAft>
-                <a:spcPts val="1200"/>
-              </a:spcAft>
-            </a:pPr>
-            <a:r>
-              <a:rPr sz="1700" b="0" i="0">
-                <a:solidFill>
-                  <a:srgbClr val="1A1A1A"/>
-                </a:solidFill>
-                <a:latin typeface="Arial"/>
-              </a:rPr>
-              <a:t>•  South Africa — SITA (sita.co.za)</a:t>
-            </a:r>
-          </a:p>
-          <a:p>
-            <a:pPr>
-              <a:spcAft>
-                <a:spcPts val="1200"/>
-              </a:spcAft>
-            </a:pPr>
-            <a:r>
-              <a:rPr sz="1700" b="0" i="0">
-                <a:solidFill>
-                  <a:srgbClr val="1A1A1A"/>
-                </a:solidFill>
-                <a:latin typeface="Arial"/>
-              </a:rPr>
-              <a:t>•  Estonia — e-Estonia.com and RIA (ria.ee)</a:t>
-            </a:r>
-          </a:p>
-          <a:p>
-            <a:pPr>
-              <a:spcAft>
-                <a:spcPts val="1200"/>
-              </a:spcAft>
-            </a:pPr>
-            <a:r>
-              <a:rPr sz="1700" b="0" i="0">
-                <a:solidFill>
-                  <a:srgbClr val="1A1A1A"/>
-                </a:solidFill>
-                <a:latin typeface="Arial"/>
-              </a:rPr>
-              <a:t>•  PAERA v1.0 — §5.7 (Recommended Roadmap); §2.1 (Problem statement)</a:t>
+              <a:t>The prompt in the companion material gives you comparator cards with cited sources. Before the next video.</a:t>
             </a:r>
           </a:p>
         </p:txBody>
@@ -14755,40 +14232,6 @@
       <p:sp>
         <p:nvSpPr>
           <p:cNvPr id="5" name="TextBox 4"/>
-          <p:cNvSpPr txBox="1"/>
-          <p:nvPr/>
-        </p:nvSpPr>
-        <p:spPr>
-          <a:xfrm>
-            <a:off x="658368" y="5806440"/>
-            <a:ext cx="10789920" cy="457200"/>
-          </a:xfrm>
-          <a:prstGeom prst="rect">
-            <a:avLst/>
-          </a:prstGeom>
-          <a:noFill/>
-        </p:spPr>
-        <p:txBody>
-          <a:bodyPr wrap="square">
-            <a:spAutoFit/>
-          </a:bodyPr>
-          <a:lstStyle/>
-          <a:p>
-            <a:r>
-              <a:rPr sz="1400" b="1" i="0">
-                <a:solidFill>
-                  <a:srgbClr val="006E96"/>
-                </a:solidFill>
-                <a:latin typeface="Arial"/>
-              </a:rPr>
-              <a:t>Find the link in the description.</a:t>
-            </a:r>
-          </a:p>
-        </p:txBody>
-      </p:sp>
-      <p:sp>
-        <p:nvSpPr>
-          <p:cNvPr id="6" name="TextBox 5"/>
           <p:cNvSpPr txBox="1"/>
           <p:nvPr/>
         </p:nvSpPr>
@@ -14816,6 +14259,41 @@
                 <a:latin typeface="Arial"/>
               </a:rPr>
               <a:t>5.1 · Is this proven, or just theory? — evidence from real programmes</a:t>
+            </a:r>
+          </a:p>
+        </p:txBody>
+      </p:sp>
+      <p:sp>
+        <p:nvSpPr>
+          <p:cNvPr id="6" name="TextBox 5"/>
+          <p:cNvSpPr txBox="1"/>
+          <p:nvPr/>
+        </p:nvSpPr>
+        <p:spPr>
+          <a:xfrm>
+            <a:off x="10058400" y="6473952"/>
+            <a:ext cx="1673352" cy="292608"/>
+          </a:xfrm>
+          <a:prstGeom prst="rect">
+            <a:avLst/>
+          </a:prstGeom>
+          <a:noFill/>
+        </p:spPr>
+        <p:txBody>
+          <a:bodyPr wrap="square">
+            <a:spAutoFit/>
+          </a:bodyPr>
+          <a:lstStyle/>
+          <a:p>
+            <a:pPr algn="r"/>
+            <a:r>
+              <a:rPr sz="900" b="0" i="0">
+                <a:solidFill>
+                  <a:srgbClr val="595959"/>
+                </a:solidFill>
+                <a:latin typeface="Arial"/>
+              </a:rPr>
+              <a:t>www.itu.int</a:t>
             </a:r>
           </a:p>
         </p:txBody>

--- a/10-Knowledge-Products/KP1-GEA/videos/module_5/en/decks/KP1_M5_5.1_Deck_v0.2.pptx
+++ b/10-Knowledge-Products/KP1-GEA/videos/module_5/en/decks/KP1_M5_5.1_Deck_v0.2.pptx
@@ -12056,7 +12056,7 @@
                 </a:solidFill>
                 <a:latin typeface="Arial"/>
               </a:rPr>
-              <a:t>~4 minutes · standalone video · voice-over on text slides</a:t>
+              <a:t>standalone video · voice-over on text slides</a:t>
             </a:r>
           </a:p>
         </p:txBody>

--- a/10-Knowledge-Products/KP1-GEA/videos/module_5/en/decks/KP1_M5_5.1_Deck_v0.2.pptx
+++ b/10-Knowledge-Products/KP1-GEA/videos/module_5/en/decks/KP1_M5_5.1_Deck_v0.2.pptx
@@ -11920,7 +11920,7 @@
                 </a:solidFill>
                 <a:latin typeface="Arial"/>
               </a:rPr>
-              <a:t>KP1 · MODULE 5 · VIDEO 5.1</a:t>
+              <a:t>MODULE 5 · VIDEO 5.1</a:t>
             </a:r>
           </a:p>
         </p:txBody>
